--- a/deliverables/openstack-rhoso-dbaas-casestudy.pptx
+++ b/deliverables/openstack-rhoso-dbaas-casestudy.pptx
@@ -8,21 +8,6 @@
     <p:sldId id="256" r:id="rId7"/>
     <p:sldId id="257" r:id="rId8"/>
     <p:sldId id="258" r:id="rId9"/>
-    <p:sldId id="259" r:id="rId10"/>
-    <p:sldId id="260" r:id="rId11"/>
-    <p:sldId id="261" r:id="rId12"/>
-    <p:sldId id="262" r:id="rId13"/>
-    <p:sldId id="263" r:id="rId14"/>
-    <p:sldId id="264" r:id="rId15"/>
-    <p:sldId id="265" r:id="rId16"/>
-    <p:sldId id="266" r:id="rId17"/>
-    <p:sldId id="267" r:id="rId18"/>
-    <p:sldId id="268" r:id="rId19"/>
-    <p:sldId id="269" r:id="rId20"/>
-    <p:sldId id="270" r:id="rId21"/>
-    <p:sldId id="271" r:id="rId22"/>
-    <p:sldId id="272" r:id="rId23"/>
-    <p:sldId id="273" r:id="rId24"/>
   </p:sldIdLst>
   <p:sldSz cx="9144000" cy="6858000" type="screen4x3"/>
   <p:notesSz cx="6858000" cy="9144000"/>
@@ -3119,7 +3104,11 @@
         <p:txBody>
           <a:bodyPr/>
           <a:lstStyle/>
-          <a:p/>
+          <a:p>
+            <a:r>
+              <a:t>OpenStack RHOSO DBaaS Proof of Concept</a:t>
+            </a:r>
+          </a:p>
         </p:txBody>
       </p:sp>
       <p:sp>
@@ -3147,7 +3136,7 @@
         </p:nvSpPr>
         <p:spPr>
           <a:xfrm>
-            <a:off x="914400" y="1828800"/>
+            <a:off x="914400" y="914400"/>
             <a:ext cx="7315200" cy="1828800"/>
           </a:xfrm>
           <a:prstGeom prst="rect">
@@ -3161,19 +3150,9 @@
           </a:bodyPr>
           <a:lstStyle/>
           <a:p>
-            <a:pPr algn="ctr">
-              <a:lnSpc>
-                <a:spcPct val="120000"/>
-              </a:lnSpc>
-            </a:pPr>
-            <a:r>
-              <a:rPr sz="4400" b="1" i="0" u="none">
-                <a:solidFill>
-                  <a:srgbClr val="0078D7"/>
-                </a:solidFill>
-                <a:latin typeface="Segoe UI"/>
-              </a:rPr>
-              <a:t>OpenStack RHOSO DBaaS</a:t>
+            <a:r>
+              <a:rPr sz="3200" b="1"/>
+              <a:t>OpenStack RHOSO DBaaS Proof of Concept</a:t>
             </a:r>
           </a:p>
         </p:txBody>
@@ -3186,7 +3165,7 @@
         </p:nvSpPr>
         <p:spPr>
           <a:xfrm>
-            <a:off x="914400" y="3840480"/>
+            <a:off x="914400" y="2743200"/>
             <a:ext cx="7315200" cy="914400"/>
           </a:xfrm>
           <a:prstGeom prst="rect">
@@ -3200,1498 +3179,11 @@
           </a:bodyPr>
           <a:lstStyle/>
           <a:p>
-            <a:pPr algn="ctr">
-              <a:lnSpc>
-                <a:spcPct val="120000"/>
-              </a:lnSpc>
-            </a:pPr>
-            <a:r>
-              <a:rPr sz="2400" b="1" i="1" u="none">
-                <a:solidFill>
-                  <a:srgbClr val="444444"/>
-                </a:solidFill>
-                <a:latin typeface="Segoe UI Light"/>
-              </a:rPr>
+            <a:r>
+              <a:rPr sz="2000"/>
               <a:t>A CASAN-Aligned Technical Case Study</a:t>
             </a:r>
           </a:p>
-        </p:txBody>
-      </p:sp>
-      <p:sp>
-        <p:nvSpPr>
-          <p:cNvPr id="6" name="TextBox 5"/>
-          <p:cNvSpPr txBox="1"/>
-          <p:nvPr/>
-        </p:nvSpPr>
-        <p:spPr>
-          <a:xfrm>
-            <a:off x="914400" y="5303520"/>
-            <a:ext cx="7315200" cy="731520"/>
-          </a:xfrm>
-          <a:prstGeom prst="rect">
-            <a:avLst/>
-          </a:prstGeom>
-          <a:noFill/>
-        </p:spPr>
-        <p:txBody>
-          <a:bodyPr wrap="square">
-            <a:spAutoFit/>
-          </a:bodyPr>
-          <a:lstStyle/>
-          <a:p>
-            <a:pPr algn="ctr">
-              <a:lnSpc>
-                <a:spcPct val="120000"/>
-              </a:lnSpc>
-            </a:pPr>
-            <a:r>
-              <a:rPr sz="1400" b="1" i="0" u="none">
-                <a:solidFill>
-                  <a:srgbClr val="00B0F0"/>
-                </a:solidFill>
-                <a:latin typeface="Segoe UI"/>
-              </a:rPr>
-              <a:t>FPT AI-in-SDLC Team | May 2026</a:t>
-            </a:r>
-          </a:p>
-        </p:txBody>
-      </p:sp>
-      <p:sp>
-        <p:nvSpPr>
-          <p:cNvPr id="7" name="Rectangle 6"/>
-          <p:cNvSpPr/>
-          <p:nvPr/>
-        </p:nvSpPr>
-        <p:spPr>
-          <a:xfrm>
-            <a:off x="3200400" y="6217920"/>
-            <a:ext cx="2743200" cy="91440"/>
-          </a:xfrm>
-          <a:prstGeom prst="rect">
-            <a:avLst/>
-          </a:prstGeom>
-          <a:ln>
-            <a:noFill/>
-          </a:ln>
-        </p:spPr>
-        <p:style>
-          <a:lnRef idx="1">
-            <a:schemeClr val="accent1"/>
-          </a:lnRef>
-          <a:fillRef idx="3">
-            <a:schemeClr val="accent1"/>
-          </a:fillRef>
-          <a:effectRef idx="2">
-            <a:schemeClr val="accent1"/>
-          </a:effectRef>
-          <a:fontRef idx="minor">
-            <a:schemeClr val="lt1"/>
-          </a:fontRef>
-        </p:style>
-        <p:txBody>
-          <a:bodyPr rtlCol="0" anchor="ctr"/>
-          <a:lstStyle/>
-          <a:p>
-            <a:pPr algn="ctr"/>
-          </a:p>
-        </p:txBody>
-      </p:sp>
-    </p:spTree>
-  </p:cSld>
-  <p:clrMapOvr>
-    <a:masterClrMapping/>
-  </p:clrMapOvr>
-</p:sld>
-</file>
-
-<file path=ppt/slides/slide10.xml><?xml version="1.0" encoding="utf-8"?>
-<p:sld xmlns:a="http://schemas.openxmlformats.org/drawingml/2006/main" xmlns:p="http://schemas.openxmlformats.org/presentationml/2006/main" xmlns:r="http://schemas.openxmlformats.org/officeDocument/2006/relationships">
-  <p:cSld>
-    <p:spTree>
-      <p:nvGrpSpPr>
-        <p:cNvPr id="1" name=""/>
-        <p:cNvGrpSpPr/>
-        <p:nvPr/>
-      </p:nvGrpSpPr>
-      <p:grpSpPr/>
-      <p:sp>
-        <p:nvSpPr>
-          <p:cNvPr id="2" name="Title 1"/>
-          <p:cNvSpPr>
-            <a:spLocks noGrp="1"/>
-          </p:cNvSpPr>
-          <p:nvPr>
-            <p:ph type="title"/>
-          </p:nvPr>
-        </p:nvSpPr>
-        <p:spPr/>
-        <p:txBody>
-          <a:bodyPr/>
-          <a:lstStyle/>
-          <a:p>
-            <a:r>
-              <a:t>DBaaS Architecture Patterns</a:t>
-            </a:r>
-          </a:p>
-        </p:txBody>
-      </p:sp>
-      <p:sp>
-        <p:nvSpPr>
-          <p:cNvPr id="3" name="Content Placeholder 2"/>
-          <p:cNvSpPr>
-            <a:spLocks noGrp="1"/>
-          </p:cNvSpPr>
-          <p:nvPr>
-            <p:ph idx="1"/>
-          </p:nvPr>
-        </p:nvSpPr>
-        <p:spPr/>
-        <p:txBody>
-          <a:bodyPr/>
-          <a:lstStyle/>
-          <a:p/>
-        </p:txBody>
-      </p:sp>
-      <p:sp>
-        <p:nvSpPr>
-          <p:cNvPr id="4" name="TextBox 3"/>
-          <p:cNvSpPr txBox="1"/>
-          <p:nvPr/>
-        </p:nvSpPr>
-        <p:spPr>
-          <a:xfrm>
-            <a:off x="457200" y="1371600"/>
-            <a:ext cx="8229600" cy="4114800"/>
-          </a:xfrm>
-          <a:prstGeom prst="rect">
-            <a:avLst/>
-          </a:prstGeom>
-          <a:noFill/>
-        </p:spPr>
-        <p:txBody>
-          <a:bodyPr wrap="none">
-            <a:spAutoFit/>
-          </a:bodyPr>
-          <a:lstStyle/>
-          <a:p>
-            <a:r>
-              <a:t>Overall: 34/36 Passed (94.4%)\n\nCritical T1/MUST Items: 16/16 Passed (100%)\n\nBreakdown by Domain:\n  • HA Failover (Patroni + etcd): 100% pass\n  • Backup/Restore (pgBackRest + NFS): 100% pass\n  • Scaling (CPU/RAM/Storage resize): 100% pass\n  • Network isolation (OVN security groups): 100% pass\n  • Monitoring (Prometheus + Grafana): 100% pass\n\n2 Skipped: V8 (24h stability, deferred to production), V14 (Capacity 2K, design only)\n1 Conditional: V33 (Scale-Up, PB done, PA pending)\n\nReference: AWS RHOSO 18.0 cluster on EC2 c5d.metal bare-metal nodes\nEvidence: 169 evidence files collected across validation window (May 13-19, 2026)</a:t>
-            </a:r>
-          </a:p>
-        </p:txBody>
-      </p:sp>
-    </p:spTree>
-  </p:cSld>
-  <p:clrMapOvr>
-    <a:masterClrMapping/>
-  </p:clrMapOvr>
-</p:sld>
-</file>
-
-<file path=ppt/slides/slide11.xml><?xml version="1.0" encoding="utf-8"?>
-<p:sld xmlns:a="http://schemas.openxmlformats.org/drawingml/2006/main" xmlns:p="http://schemas.openxmlformats.org/presentationml/2006/main" xmlns:r="http://schemas.openxmlformats.org/officeDocument/2006/relationships">
-  <p:cSld>
-    <p:spTree>
-      <p:nvGrpSpPr>
-        <p:cNvPr id="1" name=""/>
-        <p:cNvGrpSpPr/>
-        <p:nvPr/>
-      </p:nvGrpSpPr>
-      <p:grpSpPr/>
-      <p:sp>
-        <p:nvSpPr>
-          <p:cNvPr id="2" name="Title 1"/>
-          <p:cNvSpPr>
-            <a:spLocks noGrp="1"/>
-          </p:cNvSpPr>
-          <p:nvPr>
-            <p:ph type="title"/>
-          </p:nvPr>
-        </p:nvSpPr>
-        <p:spPr/>
-        <p:txBody>
-          <a:bodyPr/>
-          <a:lstStyle/>
-          <a:p>
-            <a:r>
-              <a:t>Verification Results: 94.4% Pass Rate</a:t>
-            </a:r>
-          </a:p>
-        </p:txBody>
-      </p:sp>
-      <p:sp>
-        <p:nvSpPr>
-          <p:cNvPr id="3" name="Content Placeholder 2"/>
-          <p:cNvSpPr>
-            <a:spLocks noGrp="1"/>
-          </p:cNvSpPr>
-          <p:nvPr>
-            <p:ph idx="1"/>
-          </p:nvPr>
-        </p:nvSpPr>
-        <p:spPr/>
-        <p:txBody>
-          <a:bodyPr/>
-          <a:lstStyle/>
-          <a:p/>
-        </p:txBody>
-      </p:sp>
-      <p:graphicFrame>
-        <p:nvGraphicFramePr>
-          <p:cNvPr id="4" name="Table 3"/>
-          <p:cNvGraphicFramePr>
-            <a:graphicFrameLocks noGrp="1"/>
-          </p:cNvGraphicFramePr>
-          <p:nvPr/>
-        </p:nvGraphicFramePr>
-        <p:xfrm>
-          <a:off x="457200" y="1371600"/>
-          <a:ext cx="8229600" cy="3657600"/>
-        </p:xfrm>
-        <a:graphic>
-          <a:graphicData uri="http://schemas.openxmlformats.org/drawingml/2006/table">
-            <a:tbl>
-              <a:tblPr firstRow="1" bandRow="1">
-                <a:tableStyleId>{5C22544A-7EE6-4342-B048-85BDC9FD1C3A}</a:tableStyleId>
-              </a:tblPr>
-              <a:tblGrid>
-                <a:gridCol w="2057400"/>
-                <a:gridCol w="2057400"/>
-                <a:gridCol w="2057400"/>
-                <a:gridCol w="2057400"/>
-              </a:tblGrid>
-              <a:tr h="609600">
-                <a:tc>
-                  <a:txBody>
-                    <a:bodyPr wrap="square"/>
-                    <a:lstStyle/>
-                    <a:p>
-                      <a:r>
-                        <a:rPr sz="1200" b="1"/>
-                        <a:t>Level</a:t>
-                      </a:r>
-                    </a:p>
-                  </a:txBody>
-                  <a:tcPr/>
-                </a:tc>
-                <a:tc>
-                  <a:txBody>
-                    <a:bodyPr wrap="square"/>
-                    <a:lstStyle/>
-                    <a:p>
-                      <a:r>
-                        <a:rPr sz="1200" b="1"/>
-                        <a:t>Name</a:t>
-                      </a:r>
-                    </a:p>
-                  </a:txBody>
-                  <a:tcPr/>
-                </a:tc>
-                <a:tc>
-                  <a:txBody>
-                    <a:bodyPr wrap="square"/>
-                    <a:lstStyle/>
-                    <a:p>
-                      <a:r>
-                        <a:rPr sz="1200" b="1"/>
-                        <a:t>Key Characteristics</a:t>
-                      </a:r>
-                    </a:p>
-                  </a:txBody>
-                  <a:tcPr/>
-                </a:tc>
-                <a:tc>
-                  <a:txBody>
-                    <a:bodyPr wrap="square"/>
-                    <a:lstStyle/>
-                    <a:p>
-                      <a:r>
-                        <a:rPr sz="1200" b="1"/>
-                        <a:t>Our PoC Status</a:t>
-                      </a:r>
-                    </a:p>
-                  </a:txBody>
-                  <a:tcPr/>
-                </a:tc>
-              </a:tr>
-              <a:tr h="609600">
-                <a:tc>
-                  <a:txBody>
-                    <a:bodyPr wrap="square"/>
-                    <a:lstStyle/>
-                    <a:p>
-                      <a:r>
-                        <a:rPr sz="1000"/>
-                        <a:t>1</a:t>
-                      </a:r>
-                    </a:p>
-                  </a:txBody>
-                  <a:tcPr/>
-                </a:tc>
-                <a:tc>
-                  <a:txBody>
-                    <a:bodyPr wrap="square"/>
-                    <a:lstStyle/>
-                    <a:p>
-                      <a:r>
-                        <a:rPr sz="1000"/>
-                        <a:t>Curious</a:t>
-                      </a:r>
-                    </a:p>
-                  </a:txBody>
-                  <a:tcPr/>
-                </a:tc>
-                <a:tc>
-                  <a:txBody>
-                    <a:bodyPr wrap="square"/>
-                    <a:lstStyle/>
-                    <a:p>
-                      <a:r>
-                        <a:rPr sz="1000"/>
-                        <a:t>Individual AI tool usage, no governance, no standards</a:t>
-                      </a:r>
-                    </a:p>
-                  </a:txBody>
-                  <a:tcPr/>
-                </a:tc>
-                <a:tc>
-                  <a:txBody>
-                    <a:bodyPr wrap="square"/>
-                    <a:lstStyle/>
-                    <a:p>
-                      <a:r>
-                        <a:rPr sz="1000"/>
-                        <a:t>—</a:t>
-                      </a:r>
-                    </a:p>
-                  </a:txBody>
-                  <a:tcPr/>
-                </a:tc>
-              </a:tr>
-              <a:tr h="609600">
-                <a:tc>
-                  <a:txBody>
-                    <a:bodyPr wrap="square"/>
-                    <a:lstStyle/>
-                    <a:p>
-                      <a:r>
-                        <a:rPr sz="1000"/>
-                        <a:t>2</a:t>
-                      </a:r>
-                    </a:p>
-                  </a:txBody>
-                  <a:tcPr/>
-                </a:tc>
-                <a:tc>
-                  <a:txBody>
-                    <a:bodyPr wrap="square"/>
-                    <a:lstStyle/>
-                    <a:p>
-                      <a:r>
-                        <a:rPr sz="1000"/>
-                        <a:t>Augmented</a:t>
-                      </a:r>
-                    </a:p>
-                  </a:txBody>
-                  <a:tcPr/>
-                </a:tc>
-                <a:tc>
-                  <a:txBody>
-                    <a:bodyPr wrap="square"/>
-                    <a:lstStyle/>
-                    <a:p>
-                      <a:r>
-                        <a:rPr sz="1000"/>
-                        <a:t>Licensed tools, process improvement, data connectors</a:t>
-                      </a:r>
-                    </a:p>
-                  </a:txBody>
-                  <a:tcPr/>
-                </a:tc>
-                <a:tc>
-                  <a:txBody>
-                    <a:bodyPr wrap="square"/>
-                    <a:lstStyle/>
-                    <a:p>
-                      <a:r>
-                        <a:rPr sz="1000"/>
-                        <a:t>—</a:t>
-                      </a:r>
-                    </a:p>
-                  </a:txBody>
-                  <a:tcPr/>
-                </a:tc>
-              </a:tr>
-              <a:tr h="609600">
-                <a:tc>
-                  <a:txBody>
-                    <a:bodyPr wrap="square"/>
-                    <a:lstStyle/>
-                    <a:p>
-                      <a:r>
-                        <a:rPr sz="1000"/>
-                        <a:t>3</a:t>
-                      </a:r>
-                    </a:p>
-                  </a:txBody>
-                  <a:tcPr/>
-                </a:tc>
-                <a:tc>
-                  <a:txBody>
-                    <a:bodyPr wrap="square"/>
-                    <a:lstStyle/>
-                    <a:p>
-                      <a:r>
-                        <a:rPr sz="1000"/>
-                        <a:t>Standard</a:t>
-                      </a:r>
-                    </a:p>
-                  </a:txBody>
-                  <a:tcPr/>
-                </a:tc>
-                <a:tc>
-                  <a:txBody>
-                    <a:bodyPr wrap="square"/>
-                    <a:lstStyle/>
-                    <a:p>
-                      <a:r>
-                        <a:rPr sz="1000"/>
-                        <a:t>Formal governance, reusable templates, dedicated roles</a:t>
-                      </a:r>
-                    </a:p>
-                  </a:txBody>
-                  <a:tcPr/>
-                </a:tc>
-                <a:tc>
-                  <a:txBody>
-                    <a:bodyPr wrap="square"/>
-                    <a:lstStyle/>
-                    <a:p>
-                      <a:r>
-                        <a:rPr sz="1000"/>
-                        <a:t>✅ Current Level</a:t>
-                      </a:r>
-                    </a:p>
-                  </a:txBody>
-                  <a:tcPr/>
-                </a:tc>
-              </a:tr>
-              <a:tr h="609600">
-                <a:tc>
-                  <a:txBody>
-                    <a:bodyPr wrap="square"/>
-                    <a:lstStyle/>
-                    <a:p>
-                      <a:r>
-                        <a:rPr sz="1000"/>
-                        <a:t>4</a:t>
-                      </a:r>
-                    </a:p>
-                  </a:txBody>
-                  <a:tcPr/>
-                </a:tc>
-                <a:tc>
-                  <a:txBody>
-                    <a:bodyPr wrap="square"/>
-                    <a:lstStyle/>
-                    <a:p>
-                      <a:r>
-                        <a:rPr sz="1000"/>
-                        <a:t>Automated</a:t>
-                      </a:r>
-                    </a:p>
-                  </a:txBody>
-                  <a:tcPr/>
-                </a:tc>
-                <a:tc>
-                  <a:txBody>
-                    <a:bodyPr wrap="square"/>
-                    <a:lstStyle/>
-                    <a:p>
-                      <a:r>
-                        <a:rPr sz="1000"/>
-                        <a:t>Agent-operated workflows, AgentOps, exception review</a:t>
-                      </a:r>
-                    </a:p>
-                  </a:txBody>
-                  <a:tcPr/>
-                </a:tc>
-                <a:tc>
-                  <a:txBody>
-                    <a:bodyPr wrap="square"/>
-                    <a:lstStyle/>
-                    <a:p>
-                      <a:r>
-                        <a:rPr sz="1000"/>
-                        <a:t>🔼 Emerging</a:t>
-                      </a:r>
-                    </a:p>
-                  </a:txBody>
-                  <a:tcPr/>
-                </a:tc>
-              </a:tr>
-              <a:tr h="609600">
-                <a:tc>
-                  <a:txBody>
-                    <a:bodyPr wrap="square"/>
-                    <a:lstStyle/>
-                    <a:p>
-                      <a:r>
-                        <a:rPr sz="1000"/>
-                        <a:t>5</a:t>
-                      </a:r>
-                    </a:p>
-                  </a:txBody>
-                  <a:tcPr/>
-                </a:tc>
-                <a:tc>
-                  <a:txBody>
-                    <a:bodyPr wrap="square"/>
-                    <a:lstStyle/>
-                    <a:p>
-                      <a:r>
-                        <a:rPr sz="1000"/>
-                        <a:t>Native</a:t>
-                      </a:r>
-                    </a:p>
-                  </a:txBody>
-                  <a:tcPr/>
-                </a:tc>
-                <a:tc>
-                  <a:txBody>
-                    <a:bodyPr wrap="square"/>
-                    <a:lstStyle/>
-                    <a:p>
-                      <a:r>
-                        <a:rPr sz="1000"/>
-                        <a:t>AI as OS, business model innovation, continuous learning</a:t>
-                      </a:r>
-                    </a:p>
-                  </a:txBody>
-                  <a:tcPr/>
-                </a:tc>
-                <a:tc>
-                  <a:txBody>
-                    <a:bodyPr wrap="square"/>
-                    <a:lstStyle/>
-                    <a:p>
-                      <a:r>
-                        <a:rPr sz="1000"/>
-                        <a:t>Future target</a:t>
-                      </a:r>
-                    </a:p>
-                  </a:txBody>
-                  <a:tcPr/>
-                </a:tc>
-              </a:tr>
-            </a:tbl>
-          </a:graphicData>
-        </a:graphic>
-      </p:graphicFrame>
-    </p:spTree>
-  </p:cSld>
-  <p:clrMapOvr>
-    <a:masterClrMapping/>
-  </p:clrMapOvr>
-</p:sld>
-</file>
-
-<file path=ppt/slides/slide12.xml><?xml version="1.0" encoding="utf-8"?>
-<p:sld xmlns:a="http://schemas.openxmlformats.org/drawingml/2006/main" xmlns:p="http://schemas.openxmlformats.org/presentationml/2006/main" xmlns:r="http://schemas.openxmlformats.org/officeDocument/2006/relationships">
-  <p:cSld>
-    <p:spTree>
-      <p:nvGrpSpPr>
-        <p:cNvPr id="1" name=""/>
-        <p:cNvGrpSpPr/>
-        <p:nvPr/>
-      </p:nvGrpSpPr>
-      <p:grpSpPr/>
-      <p:sp>
-        <p:nvSpPr>
-          <p:cNvPr id="2" name="Title 1"/>
-          <p:cNvSpPr>
-            <a:spLocks noGrp="1"/>
-          </p:cNvSpPr>
-          <p:nvPr>
-            <p:ph type="title"/>
-          </p:nvPr>
-        </p:nvSpPr>
-        <p:spPr/>
-        <p:txBody>
-          <a:bodyPr/>
-          <a:lstStyle/>
-          <a:p>
-            <a:r>
-              <a:t>CASAN Framework: 5 Maturity Levels</a:t>
-            </a:r>
-          </a:p>
-        </p:txBody>
-      </p:sp>
-      <p:sp>
-        <p:nvSpPr>
-          <p:cNvPr id="3" name="Content Placeholder 2"/>
-          <p:cNvSpPr>
-            <a:spLocks noGrp="1"/>
-          </p:cNvSpPr>
-          <p:nvPr>
-            <p:ph idx="1"/>
-          </p:nvPr>
-        </p:nvSpPr>
-        <p:spPr/>
-        <p:txBody>
-          <a:bodyPr/>
-          <a:lstStyle/>
-          <a:p/>
-        </p:txBody>
-      </p:sp>
-      <p:sp>
-        <p:nvSpPr>
-          <p:cNvPr id="4" name="TextBox 3"/>
-          <p:cNvSpPr txBox="1"/>
-          <p:nvPr/>
-        </p:nvSpPr>
-        <p:spPr>
-          <a:xfrm>
-            <a:off x="457200" y="1371600"/>
-            <a:ext cx="8229600" cy="4572000"/>
-          </a:xfrm>
-          <a:prstGeom prst="rect">
-            <a:avLst/>
-          </a:prstGeom>
-          <a:noFill/>
-        </p:spPr>
-        <p:txBody>
-          <a:bodyPr wrap="none">
-            <a:spAutoFit/>
-          </a:bodyPr>
-          <a:lstStyle/>
-          <a:p>
-            <a:r>
-              <a:t>CASAN Assessment: Level 3 (Standard) — with emergent Level 4 characteristics\n\nEvidence of Level 3 (Standard):\n  ✅ Formal AI governance structure with dedicated roles\n  ✅ Reusable agent templates (quick, deep, writing, unspecified-high)\n  ✅ Structured data lineage (Notepads for cross-agent context)\n  ✅ Prompt library and validation checklists\n  ✅ Documented handoffs (HO-001 to HO-005)\n  ✅ ISO 42001 readiness\n\nEvidence of Level 4 (Automated):\n  🔼 Agent-operated workflows across 5 GSD Waves\n  🔼 Exception-based human review (QA gate only triggered on issues)\n  🔼 AgentOps: evidence collection, commit tracking, session audit trail\n  🔼 Multi-agent orchestration (parallel sub-agent dispatching)</a:t>
-            </a:r>
-          </a:p>
-        </p:txBody>
-      </p:sp>
-    </p:spTree>
-  </p:cSld>
-  <p:clrMapOvr>
-    <a:masterClrMapping/>
-  </p:clrMapOvr>
-</p:sld>
-</file>
-
-<file path=ppt/slides/slide13.xml><?xml version="1.0" encoding="utf-8"?>
-<p:sld xmlns:a="http://schemas.openxmlformats.org/drawingml/2006/main" xmlns:p="http://schemas.openxmlformats.org/presentationml/2006/main" xmlns:r="http://schemas.openxmlformats.org/officeDocument/2006/relationships">
-  <p:cSld>
-    <p:spTree>
-      <p:nvGrpSpPr>
-        <p:cNvPr id="1" name=""/>
-        <p:cNvGrpSpPr/>
-        <p:nvPr/>
-      </p:nvGrpSpPr>
-      <p:grpSpPr/>
-      <p:sp>
-        <p:nvSpPr>
-          <p:cNvPr id="2" name="Title 1"/>
-          <p:cNvSpPr>
-            <a:spLocks noGrp="1"/>
-          </p:cNvSpPr>
-          <p:nvPr>
-            <p:ph type="title"/>
-          </p:nvPr>
-        </p:nvSpPr>
-        <p:spPr/>
-        <p:txBody>
-          <a:bodyPr/>
-          <a:lstStyle/>
-          <a:p>
-            <a:r>
-              <a:t>CASAN Level Assessment: Our PoC</a:t>
-            </a:r>
-          </a:p>
-        </p:txBody>
-      </p:sp>
-      <p:sp>
-        <p:nvSpPr>
-          <p:cNvPr id="3" name="Content Placeholder 2"/>
-          <p:cNvSpPr>
-            <a:spLocks noGrp="1"/>
-          </p:cNvSpPr>
-          <p:nvPr>
-            <p:ph idx="1"/>
-          </p:nvPr>
-        </p:nvSpPr>
-        <p:spPr/>
-        <p:txBody>
-          <a:bodyPr/>
-          <a:lstStyle/>
-          <a:p/>
-        </p:txBody>
-      </p:sp>
-      <p:sp>
-        <p:nvSpPr>
-          <p:cNvPr id="4" name="TextBox 3"/>
-          <p:cNvSpPr txBox="1"/>
-          <p:nvPr/>
-        </p:nvSpPr>
-        <p:spPr>
-          <a:xfrm>
-            <a:off x="457200" y="1371600"/>
-            <a:ext cx="8229600" cy="4572000"/>
-          </a:xfrm>
-          <a:prstGeom prst="rect">
-            <a:avLst/>
-          </a:prstGeom>
-          <a:noFill/>
-        </p:spPr>
-        <p:txBody>
-          <a:bodyPr wrap="none">
-            <a:spAutoFit/>
-          </a:bodyPr>
-          <a:lstStyle/>
-          <a:p>
-            <a:r>
-              <a:t>CASAN AI Delegation Levels (L0-L5):\n\nL0 — Observe: AI searches, summarizes, classifies\nL1 — Draft: AI creates drafts, human reviews everything\nL2 — Recommend: AI proposes options, human decides\nL3 — Execute (Bounded): AI executes low-risk tasks within limits   ← OMO \"quick\" agents\nL4 — Operate (Workflow): AI runs workflows with guardrails, audit   ← OMO \"deep/unspecified-high\"\nL5 — Autonomous: High autonomy within strict governance\n\nOur OMO Agent Mapping:\n  quick → L3 (single task, auto-verify)\n  deep → L4 (research + analysis, human review)\n  writing → L3 (template generation, QA verification)\n  unspecified-high → L4 (complex deployment docs, guardrails)</a:t>
-            </a:r>
-          </a:p>
-        </p:txBody>
-      </p:sp>
-    </p:spTree>
-  </p:cSld>
-  <p:clrMapOvr>
-    <a:masterClrMapping/>
-  </p:clrMapOvr>
-</p:sld>
-</file>
-
-<file path=ppt/slides/slide14.xml><?xml version="1.0" encoding="utf-8"?>
-<p:sld xmlns:a="http://schemas.openxmlformats.org/drawingml/2006/main" xmlns:p="http://schemas.openxmlformats.org/presentationml/2006/main" xmlns:r="http://schemas.openxmlformats.org/officeDocument/2006/relationships">
-  <p:cSld>
-    <p:spTree>
-      <p:nvGrpSpPr>
-        <p:cNvPr id="1" name=""/>
-        <p:cNvGrpSpPr/>
-        <p:nvPr/>
-      </p:nvGrpSpPr>
-      <p:grpSpPr/>
-      <p:sp>
-        <p:nvSpPr>
-          <p:cNvPr id="2" name="Title 1"/>
-          <p:cNvSpPr>
-            <a:spLocks noGrp="1"/>
-          </p:cNvSpPr>
-          <p:nvPr>
-            <p:ph type="title"/>
-          </p:nvPr>
-        </p:nvSpPr>
-        <p:spPr/>
-        <p:txBody>
-          <a:bodyPr/>
-          <a:lstStyle/>
-          <a:p>
-            <a:r>
-              <a:t>AI Delegation Architecture (L0-L5)</a:t>
-            </a:r>
-          </a:p>
-        </p:txBody>
-      </p:sp>
-      <p:sp>
-        <p:nvSpPr>
-          <p:cNvPr id="3" name="Content Placeholder 2"/>
-          <p:cNvSpPr>
-            <a:spLocks noGrp="1"/>
-          </p:cNvSpPr>
-          <p:nvPr>
-            <p:ph idx="1"/>
-          </p:nvPr>
-        </p:nvSpPr>
-        <p:spPr/>
-        <p:txBody>
-          <a:bodyPr/>
-          <a:lstStyle/>
-          <a:p/>
-        </p:txBody>
-      </p:sp>
-      <p:graphicFrame>
-        <p:nvGraphicFramePr>
-          <p:cNvPr id="4" name="Table 3"/>
-          <p:cNvGraphicFramePr>
-            <a:graphicFrameLocks noGrp="1"/>
-          </p:cNvGraphicFramePr>
-          <p:nvPr/>
-        </p:nvGraphicFramePr>
-        <p:xfrm>
-          <a:off x="457200" y="1371600"/>
-          <a:ext cx="8229600" cy="3657600"/>
-        </p:xfrm>
-        <a:graphic>
-          <a:graphicData uri="http://schemas.openxmlformats.org/drawingml/2006/table">
-            <a:tbl>
-              <a:tblPr firstRow="1" bandRow="1">
-                <a:tableStyleId>{5C22544A-7EE6-4342-B048-85BDC9FD1C3A}</a:tableStyleId>
-              </a:tblPr>
-              <a:tblGrid>
-                <a:gridCol w="2057400"/>
-                <a:gridCol w="2057400"/>
-                <a:gridCol w="2057400"/>
-                <a:gridCol w="2057400"/>
-              </a:tblGrid>
-              <a:tr h="609600">
-                <a:tc>
-                  <a:txBody>
-                    <a:bodyPr wrap="square"/>
-                    <a:lstStyle/>
-                    <a:p>
-                      <a:r>
-                        <a:rPr sz="1200" b="1"/>
-                        <a:t>Handoff ID</a:t>
-                      </a:r>
-                    </a:p>
-                  </a:txBody>
-                  <a:tcPr/>
-                </a:tc>
-                <a:tc>
-                  <a:txBody>
-                    <a:bodyPr wrap="square"/>
-                    <a:lstStyle/>
-                    <a:p>
-                      <a:r>
-                        <a:rPr sz="1200" b="1"/>
-                        <a:t>From → To</a:t>
-                      </a:r>
-                    </a:p>
-                  </a:txBody>
-                  <a:tcPr/>
-                </a:tc>
-                <a:tc>
-                  <a:txBody>
-                    <a:bodyPr wrap="square"/>
-                    <a:lstStyle/>
-                    <a:p>
-                      <a:r>
-                        <a:rPr sz="1200" b="1"/>
-                        <a:t>Trigger</a:t>
-                      </a:r>
-                    </a:p>
-                  </a:txBody>
-                  <a:tcPr/>
-                </a:tc>
-                <a:tc>
-                  <a:txBody>
-                    <a:bodyPr wrap="square"/>
-                    <a:lstStyle/>
-                    <a:p>
-                      <a:r>
-                        <a:rPr sz="1200" b="1"/>
-                        <a:t>Artifacts</a:t>
-                      </a:r>
-                    </a:p>
-                  </a:txBody>
-                  <a:tcPr/>
-                </a:tc>
-              </a:tr>
-              <a:tr h="609600">
-                <a:tc>
-                  <a:txBody>
-                    <a:bodyPr wrap="square"/>
-                    <a:lstStyle/>
-                    <a:p>
-                      <a:r>
-                        <a:rPr sz="1000"/>
-                        <a:t>HO-001</a:t>
-                      </a:r>
-                    </a:p>
-                  </a:txBody>
-                  <a:tcPr/>
-                </a:tc>
-                <a:tc>
-                  <a:txBody>
-                    <a:bodyPr wrap="square"/>
-                    <a:lstStyle/>
-                    <a:p>
-                      <a:r>
-                        <a:rPr sz="1000"/>
-                        <a:t>Architect → DevOps</a:t>
-                      </a:r>
-                    </a:p>
-                  </a:txBody>
-                  <a:tcPr/>
-                </a:tc>
-                <a:tc>
-                  <a:txBody>
-                    <a:bodyPr wrap="square"/>
-                    <a:lstStyle/>
-                    <a:p>
-                      <a:r>
-                        <a:rPr sz="1000"/>
-                        <a:t>Pre-flight validation complete</a:t>
-                      </a:r>
-                    </a:p>
-                  </a:txBody>
-                  <a:tcPr/>
-                </a:tc>
-                <a:tc>
-                  <a:txBody>
-                    <a:bodyPr wrap="square"/>
-                    <a:lstStyle/>
-                    <a:p>
-                      <a:r>
-                        <a:rPr sz="1000"/>
-                        <a:t>Env validation report, Baseline docs</a:t>
-                      </a:r>
-                    </a:p>
-                  </a:txBody>
-                  <a:tcPr/>
-                </a:tc>
-              </a:tr>
-              <a:tr h="609600">
-                <a:tc>
-                  <a:txBody>
-                    <a:bodyPr wrap="square"/>
-                    <a:lstStyle/>
-                    <a:p>
-                      <a:r>
-                        <a:rPr sz="1000"/>
-                        <a:t>HO-002</a:t>
-                      </a:r>
-                    </a:p>
-                  </a:txBody>
-                  <a:tcPr/>
-                </a:tc>
-                <a:tc>
-                  <a:txBody>
-                    <a:bodyPr wrap="square"/>
-                    <a:lstStyle/>
-                    <a:p>
-                      <a:r>
-                        <a:rPr sz="1000"/>
-                        <a:t>DevOps → DBA</a:t>
-                      </a:r>
-                    </a:p>
-                  </a:txBody>
-                  <a:tcPr/>
-                </a:tc>
-                <a:tc>
-                  <a:txBody>
-                    <a:bodyPr wrap="square"/>
-                    <a:lstStyle/>
-                    <a:p>
-                      <a:r>
-                        <a:rPr sz="1000"/>
-                        <a:t>RHOSO env configured</a:t>
-                      </a:r>
-                    </a:p>
-                  </a:txBody>
-                  <a:tcPr/>
-                </a:tc>
-                <a:tc>
-                  <a:txBody>
-                    <a:bodyPr wrap="square"/>
-                    <a:lstStyle/>
-                    <a:p>
-                      <a:r>
-                        <a:rPr sz="1000"/>
-                        <a:t>RHOSO access docs, Deployment configs</a:t>
-                      </a:r>
-                    </a:p>
-                  </a:txBody>
-                  <a:tcPr/>
-                </a:tc>
-              </a:tr>
-              <a:tr h="609600">
-                <a:tc>
-                  <a:txBody>
-                    <a:bodyPr wrap="square"/>
-                    <a:lstStyle/>
-                    <a:p>
-                      <a:r>
-                        <a:rPr sz="1000"/>
-                        <a:t>HO-003</a:t>
-                      </a:r>
-                    </a:p>
-                  </a:txBody>
-                  <a:tcPr/>
-                </a:tc>
-                <a:tc>
-                  <a:txBody>
-                    <a:bodyPr wrap="square"/>
-                    <a:lstStyle/>
-                    <a:p>
-                      <a:r>
-                        <a:rPr sz="1000"/>
-                        <a:t>DBA → QA</a:t>
-                      </a:r>
-                    </a:p>
-                  </a:txBody>
-                  <a:tcPr/>
-                </a:tc>
-                <a:tc>
-                  <a:txBody>
-                    <a:bodyPr wrap="square"/>
-                    <a:lstStyle/>
-                    <a:p>
-                      <a:r>
-                        <a:rPr sz="1000"/>
-                        <a:t>DBaaS deployed</a:t>
-                      </a:r>
-                    </a:p>
-                  </a:txBody>
-                  <a:tcPr/>
-                </a:tc>
-                <a:tc>
-                  <a:txBody>
-                    <a:bodyPr wrap="square"/>
-                    <a:lstStyle/>
-                    <a:p>
-                      <a:r>
-                        <a:rPr sz="1000"/>
-                        <a:t>DBaaS deployment docs, Architecture comparison</a:t>
-                      </a:r>
-                    </a:p>
-                  </a:txBody>
-                  <a:tcPr/>
-                </a:tc>
-              </a:tr>
-              <a:tr h="609600">
-                <a:tc>
-                  <a:txBody>
-                    <a:bodyPr wrap="square"/>
-                    <a:lstStyle/>
-                    <a:p>
-                      <a:r>
-                        <a:rPr sz="1000"/>
-                        <a:t>HO-004</a:t>
-                      </a:r>
-                    </a:p>
-                  </a:txBody>
-                  <a:tcPr/>
-                </a:tc>
-                <a:tc>
-                  <a:txBody>
-                    <a:bodyPr wrap="square"/>
-                    <a:lstStyle/>
-                    <a:p>
-                      <a:r>
-                        <a:rPr sz="1000"/>
-                        <a:t>QA → Architect/PM</a:t>
-                      </a:r>
-                    </a:p>
-                  </a:txBody>
-                  <a:tcPr/>
-                </a:tc>
-                <a:tc>
-                  <a:txBody>
-                    <a:bodyPr wrap="square"/>
-                    <a:lstStyle/>
-                    <a:p>
-                      <a:r>
-                        <a:rPr sz="1000"/>
-                        <a:t>Verification complete</a:t>
-                      </a:r>
-                    </a:p>
-                  </a:txBody>
-                  <a:tcPr/>
-                </a:tc>
-                <a:tc>
-                  <a:txBody>
-                    <a:bodyPr wrap="square"/>
-                    <a:lstStyle/>
-                    <a:p>
-                      <a:r>
-                        <a:rPr sz="1000"/>
-                        <a:t>34/36 test results, Evidence index</a:t>
-                      </a:r>
-                    </a:p>
-                  </a:txBody>
-                  <a:tcPr/>
-                </a:tc>
-              </a:tr>
-              <a:tr h="609600">
-                <a:tc>
-                  <a:txBody>
-                    <a:bodyPr wrap="square"/>
-                    <a:lstStyle/>
-                    <a:p>
-                      <a:r>
-                        <a:rPr sz="1000"/>
-                        <a:t>HO-005</a:t>
-                      </a:r>
-                    </a:p>
-                  </a:txBody>
-                  <a:tcPr/>
-                </a:tc>
-                <a:tc>
-                  <a:txBody>
-                    <a:bodyPr wrap="square"/>
-                    <a:lstStyle/>
-                    <a:p>
-                      <a:r>
-                        <a:rPr sz="1000"/>
-                        <a:t>PM → Stakeholders</a:t>
-                      </a:r>
-                    </a:p>
-                  </a:txBody>
-                  <a:tcPr/>
-                </a:tc>
-                <a:tc>
-                  <a:txBody>
-                    <a:bodyPr wrap="square"/>
-                    <a:lstStyle/>
-                    <a:p>
-                      <a:r>
-                        <a:rPr sz="1000"/>
-                        <a:t>Case study assembled</a:t>
-                      </a:r>
-                    </a:p>
-                  </a:txBody>
-                  <a:tcPr/>
-                </a:tc>
-                <a:tc>
-                  <a:txBody>
-                    <a:bodyPr wrap="square"/>
-                    <a:lstStyle/>
-                    <a:p>
-                      <a:r>
-                        <a:rPr sz="1000"/>
-                        <a:t>Final case study doc, CASAN assessment</a:t>
-                      </a:r>
-                    </a:p>
-                  </a:txBody>
-                  <a:tcPr/>
-                </a:tc>
-              </a:tr>
-            </a:tbl>
-          </a:graphicData>
-        </a:graphic>
-      </p:graphicFrame>
-    </p:spTree>
-  </p:cSld>
-  <p:clrMapOvr>
-    <a:masterClrMapping/>
-  </p:clrMapOvr>
-</p:sld>
-</file>
-
-<file path=ppt/slides/slide15.xml><?xml version="1.0" encoding="utf-8"?>
-<p:sld xmlns:a="http://schemas.openxmlformats.org/drawingml/2006/main" xmlns:p="http://schemas.openxmlformats.org/presentationml/2006/main" xmlns:r="http://schemas.openxmlformats.org/officeDocument/2006/relationships">
-  <p:cSld>
-    <p:spTree>
-      <p:nvGrpSpPr>
-        <p:cNvPr id="1" name=""/>
-        <p:cNvGrpSpPr/>
-        <p:nvPr/>
-      </p:nvGrpSpPr>
-      <p:grpSpPr/>
-      <p:sp>
-        <p:nvSpPr>
-          <p:cNvPr id="2" name="Title 1"/>
-          <p:cNvSpPr>
-            <a:spLocks noGrp="1"/>
-          </p:cNvSpPr>
-          <p:nvPr>
-            <p:ph type="title"/>
-          </p:nvPr>
-        </p:nvSpPr>
-        <p:spPr/>
-        <p:txBody>
-          <a:bodyPr/>
-          <a:lstStyle/>
-          <a:p>
-            <a:r>
-              <a:t>Formal Handoffs &amp; Governance</a:t>
-            </a:r>
-          </a:p>
-        </p:txBody>
-      </p:sp>
-      <p:sp>
-        <p:nvSpPr>
-          <p:cNvPr id="3" name="Content Placeholder 2"/>
-          <p:cNvSpPr>
-            <a:spLocks noGrp="1"/>
-          </p:cNvSpPr>
-          <p:nvPr>
-            <p:ph idx="1"/>
-          </p:nvPr>
-        </p:nvSpPr>
-        <p:spPr/>
-        <p:txBody>
-          <a:bodyPr/>
-          <a:lstStyle/>
-          <a:p/>
-          <a:p>
-            <a:pPr/>
-            <a:r>
-              <a:t>Document-based validation works for greenfield teams — leveraging existing knowledge bases accelerates delivery</a:t>
-            </a:r>
-          </a:p>
-          <a:p>
-            <a:pPr/>
-            <a:r>
-              <a:t>AI agent categories (quick/deep/writing) map naturally to CASAN delegation levels L3-L4</a:t>
-            </a:r>
-          </a:p>
-          <a:p>
-            <a:pPr/>
-            <a:r>
-              <a:t>Formal handoff records create governance audit trail even in small teams — critical for enterprise adoption</a:t>
-            </a:r>
-          </a:p>
-          <a:p>
-            <a:pPr/>
-            <a:r>
-              <a:t>Parallel GSD Wave execution reduced timeline from weeks to hours</a:t>
-            </a:r>
-          </a:p>
-          <a:p>
-            <a:pPr/>
-            <a:r>
-              <a:t>FPT CASAN framework provides practical, actionable maturity roadmap for AI-assisted delivery</a:t>
-            </a:r>
-          </a:p>
-          <a:p>
-            <a:pPr/>
-            <a:r>
-              <a:t>Physical infrastructure gaps (bond issues, blocking decisions) are the primary bottleneck, not AI capability</a:t>
-            </a:r>
-          </a:p>
-          <a:p>
-            <a:pPr/>
-            <a:r>
-              <a:t>94.4% validation pass rate proves architecture is production-ready; only deferred items (24h stability, 2K capacity) remain</a:t>
-            </a:r>
-          </a:p>
-        </p:txBody>
-      </p:sp>
-    </p:spTree>
-  </p:cSld>
-  <p:clrMapOvr>
-    <a:masterClrMapping/>
-  </p:clrMapOvr>
-</p:sld>
-</file>
-
-<file path=ppt/slides/slide16.xml><?xml version="1.0" encoding="utf-8"?>
-<p:sld xmlns:a="http://schemas.openxmlformats.org/drawingml/2006/main" xmlns:p="http://schemas.openxmlformats.org/presentationml/2006/main" xmlns:r="http://schemas.openxmlformats.org/officeDocument/2006/relationships">
-  <p:cSld>
-    <p:spTree>
-      <p:nvGrpSpPr>
-        <p:cNvPr id="1" name=""/>
-        <p:cNvGrpSpPr/>
-        <p:nvPr/>
-      </p:nvGrpSpPr>
-      <p:grpSpPr/>
-      <p:sp>
-        <p:nvSpPr>
-          <p:cNvPr id="2" name="Title 1"/>
-          <p:cNvSpPr>
-            <a:spLocks noGrp="1"/>
-          </p:cNvSpPr>
-          <p:nvPr>
-            <p:ph type="title"/>
-          </p:nvPr>
-        </p:nvSpPr>
-        <p:spPr/>
-        <p:txBody>
-          <a:bodyPr/>
-          <a:lstStyle/>
-          <a:p>
-            <a:r>
-              <a:t>Lessons Learned</a:t>
-            </a:r>
-          </a:p>
-        </p:txBody>
-      </p:sp>
-      <p:sp>
-        <p:nvSpPr>
-          <p:cNvPr id="3" name="Content Placeholder 2"/>
-          <p:cNvSpPr>
-            <a:spLocks noGrp="1"/>
-          </p:cNvSpPr>
-          <p:nvPr>
-            <p:ph idx="1"/>
-          </p:nvPr>
-        </p:nvSpPr>
-        <p:spPr/>
-        <p:txBody>
-          <a:bodyPr/>
-          <a:lstStyle/>
-          <a:p/>
-          <a:p>
-            <a:pPr/>
-            <a:r>
-              <a:t>RHOSO DBaaS architecture is validated and production-ready (94.4% pass, 100% critical coverage)</a:t>
-            </a:r>
-          </a:p>
-          <a:p>
-            <a:pPr/>
-            <a:r>
-              <a:t>FPT CASAN methodology enables structured AI-assisted delivery — PoC achieved Level 3 (Standard) with Level 4 emergence</a:t>
-            </a:r>
-          </a:p>
-          <a:p>
-            <a:pPr/>
-            <a:r>
-              <a:t>GSD + OMO combination provides repeatable, governable AI-SDLC framework applicable to any project</a:t>
-            </a:r>
-          </a:p>
-          <a:p>
-            <a:pPr/>
-            <a:r>
-              <a:t>Document-based validation + existing knowledge bases = rapid greenfield onboarding (time to result: 1 day)</a:t>
-            </a:r>
-          </a:p>
-          <a:p>
-            <a:pPr/>
-            <a:r>
-              <a:t>Recommended DBaaS path: Pattern-2B (FPT Cloud Managed Service) with Patroni PostgreSQL HA stack</a:t>
-            </a:r>
-          </a:p>
-          <a:p>
-            <a:pPr/>
-            <a:r>
-              <a:t>Next step: Resolve 3 blocking decisions (KP-02/03/05) to complete physical RHOSO deployment</a:t>
-            </a:r>
-          </a:p>
-        </p:txBody>
-      </p:sp>
-    </p:spTree>
-  </p:cSld>
-  <p:clrMapOvr>
-    <a:masterClrMapping/>
-  </p:clrMapOvr>
-</p:sld>
-</file>
-
-<file path=ppt/slides/slide17.xml><?xml version="1.0" encoding="utf-8"?>
-<p:sld xmlns:a="http://schemas.openxmlformats.org/drawingml/2006/main" xmlns:p="http://schemas.openxmlformats.org/presentationml/2006/main" xmlns:r="http://schemas.openxmlformats.org/officeDocument/2006/relationships">
-  <p:cSld>
-    <p:spTree>
-      <p:nvGrpSpPr>
-        <p:cNvPr id="1" name=""/>
-        <p:cNvGrpSpPr/>
-        <p:nvPr/>
-      </p:nvGrpSpPr>
-      <p:grpSpPr/>
-      <p:sp>
-        <p:nvSpPr>
-          <p:cNvPr id="2" name="Title 1"/>
-          <p:cNvSpPr>
-            <a:spLocks noGrp="1"/>
-          </p:cNvSpPr>
-          <p:nvPr>
-            <p:ph type="title"/>
-          </p:nvPr>
-        </p:nvSpPr>
-        <p:spPr/>
-        <p:txBody>
-          <a:bodyPr/>
-          <a:lstStyle/>
-          <a:p>
-            <a:r>
-              <a:t>Key Takeaways</a:t>
-            </a:r>
-          </a:p>
-        </p:txBody>
-      </p:sp>
-      <p:sp>
-        <p:nvSpPr>
-          <p:cNvPr id="3" name="Content Placeholder 2"/>
-          <p:cNvSpPr>
-            <a:spLocks noGrp="1"/>
-          </p:cNvSpPr>
-          <p:nvPr>
-            <p:ph idx="1"/>
-          </p:nvPr>
-        </p:nvSpPr>
-        <p:spPr/>
-        <p:txBody>
-          <a:bodyPr/>
-          <a:lstStyle/>
-          <a:p/>
-        </p:txBody>
-      </p:sp>
-      <p:sp>
-        <p:nvSpPr>
-          <p:cNvPr id="4" name="TextBox 3"/>
-          <p:cNvSpPr txBox="1"/>
-          <p:nvPr/>
-        </p:nvSpPr>
-        <p:spPr>
-          <a:xfrm>
-            <a:off x="457200" y="1371600"/>
-            <a:ext cx="8229600" cy="1828800"/>
-          </a:xfrm>
-          <a:prstGeom prst="rect">
-            <a:avLst/>
-          </a:prstGeom>
-          <a:noFill/>
-        </p:spPr>
-        <p:txBody>
-          <a:bodyPr wrap="none">
-            <a:spAutoFit/>
-          </a:bodyPr>
-          <a:lstStyle/>
-          <a:p>
-            <a:r>
-              <a:t>OpenStack RHOSO DBaaS — A CASAN-Aligned Case Study\n\nFull Case Study: deliverables/openstack-rhoso-dbaas-casestudy.md\nFPT AI-in-SDLC Team | May 2026\n\nQuestions?</a:t>
-            </a:r>
-          </a:p>
-        </p:txBody>
-      </p:sp>
-    </p:spTree>
-  </p:cSld>
-  <p:clrMapOvr>
-    <a:masterClrMapping/>
-  </p:clrMapOvr>
-</p:sld>
-</file>
-
-<file path=ppt/slides/slide18.xml><?xml version="1.0" encoding="utf-8"?>
-<p:sld xmlns:a="http://schemas.openxmlformats.org/drawingml/2006/main" xmlns:p="http://schemas.openxmlformats.org/presentationml/2006/main" xmlns:r="http://schemas.openxmlformats.org/officeDocument/2006/relationships">
-  <p:cSld>
-    <p:spTree>
-      <p:nvGrpSpPr>
-        <p:cNvPr id="1" name=""/>
-        <p:cNvGrpSpPr/>
-        <p:nvPr/>
-      </p:nvGrpSpPr>
-      <p:grpSpPr/>
-      <p:sp>
-        <p:nvSpPr>
-          <p:cNvPr id="2" name="Title 1"/>
-          <p:cNvSpPr>
-            <a:spLocks noGrp="1"/>
-          </p:cNvSpPr>
-          <p:nvPr>
-            <p:ph type="title"/>
-          </p:nvPr>
-        </p:nvSpPr>
-        <p:spPr/>
-        <p:txBody>
-          <a:bodyPr/>
-          <a:lstStyle/>
-          <a:p>
-            <a:r>
-              <a:t>Thank You &amp;amp; Questions</a:t>
-            </a:r>
-          </a:p>
-        </p:txBody>
-      </p:sp>
-      <p:sp>
-        <p:nvSpPr>
-          <p:cNvPr id="3" name="Content Placeholder 2"/>
-          <p:cNvSpPr>
-            <a:spLocks noGrp="1"/>
-          </p:cNvSpPr>
-          <p:nvPr>
-            <p:ph idx="1"/>
-          </p:nvPr>
-        </p:nvSpPr>
-        <p:spPr/>
-        <p:txBody>
-          <a:bodyPr/>
-          <a:lstStyle/>
-          <a:p/>
         </p:txBody>
       </p:sp>
     </p:spTree>
@@ -4726,348 +3218,116 @@
         <p:txBody>
           <a:bodyPr/>
           <a:lstStyle/>
+          <a:p>
+            <a:r>
+              <a:t>Agenda</a:t>
+            </a:r>
+          </a:p>
+        </p:txBody>
+      </p:sp>
+      <p:sp>
+        <p:nvSpPr>
+          <p:cNvPr id="3" name="Content Placeholder 2"/>
+          <p:cNvSpPr>
+            <a:spLocks noGrp="1"/>
+          </p:cNvSpPr>
+          <p:nvPr>
+            <p:ph idx="1"/>
+          </p:nvPr>
+        </p:nvSpPr>
+        <p:spPr/>
+        <p:txBody>
+          <a:bodyPr/>
+          <a:lstStyle/>
           <a:p/>
-        </p:txBody>
-      </p:sp>
-      <p:sp>
-        <p:nvSpPr>
-          <p:cNvPr id="3" name="Content Placeholder 2"/>
-          <p:cNvSpPr>
-            <a:spLocks noGrp="1"/>
-          </p:cNvSpPr>
-          <p:nvPr>
-            <p:ph idx="1"/>
-          </p:nvPr>
-        </p:nvSpPr>
-        <p:spPr/>
-        <p:txBody>
-          <a:bodyPr/>
-          <a:lstStyle/>
-          <a:p/>
-        </p:txBody>
-      </p:sp>
-      <p:sp>
-        <p:nvSpPr>
-          <p:cNvPr id="4" name="TextBox 3"/>
-          <p:cNvSpPr txBox="1"/>
-          <p:nvPr/>
-        </p:nvSpPr>
-        <p:spPr>
-          <a:xfrm>
-            <a:off x="457200" y="365760"/>
-            <a:ext cx="8229600" cy="914400"/>
-          </a:xfrm>
-          <a:prstGeom prst="rect">
-            <a:avLst/>
-          </a:prstGeom>
-          <a:noFill/>
-        </p:spPr>
-        <p:txBody>
-          <a:bodyPr wrap="square">
-            <a:spAutoFit/>
-          </a:bodyPr>
-          <a:lstStyle/>
-          <a:p>
-            <a:pPr algn="l">
-              <a:lnSpc>
-                <a:spcPct val="120000"/>
-              </a:lnSpc>
-            </a:pPr>
-            <a:r>
-              <a:rPr sz="4100" b="1" i="0" u="sng">
-                <a:solidFill>
-                  <a:srgbClr val="0078D7"/>
-                </a:solidFill>
-                <a:latin typeface="Segoe UI"/>
-              </a:rPr>
-              <a:t>Agenda</a:t>
-            </a:r>
-          </a:p>
-        </p:txBody>
-      </p:sp>
-      <p:sp>
-        <p:nvSpPr>
-          <p:cNvPr id="5" name="Rectangle 4"/>
-          <p:cNvSpPr/>
-          <p:nvPr/>
-        </p:nvSpPr>
-        <p:spPr>
-          <a:xfrm>
-            <a:off x="457200" y="1188720"/>
-            <a:ext cx="2743200" cy="73152"/>
-          </a:xfrm>
-          <a:prstGeom prst="rect">
-            <a:avLst/>
-          </a:prstGeom>
-          <a:ln>
-            <a:noFill/>
-          </a:ln>
-        </p:spPr>
-        <p:style>
-          <a:lnRef idx="1">
-            <a:schemeClr val="accent1"/>
-          </a:lnRef>
-          <a:fillRef idx="3">
-            <a:schemeClr val="accent1"/>
-          </a:fillRef>
-          <a:effectRef idx="2">
-            <a:schemeClr val="accent1"/>
-          </a:effectRef>
-          <a:fontRef idx="minor">
-            <a:schemeClr val="lt1"/>
-          </a:fontRef>
-        </p:style>
-        <p:txBody>
-          <a:bodyPr rtlCol="0" anchor="ctr"/>
-          <a:lstStyle/>
-          <a:p>
-            <a:pPr algn="ctr"/>
-          </a:p>
-        </p:txBody>
-      </p:sp>
-      <p:sp>
-        <p:nvSpPr>
-          <p:cNvPr id="6" name="TextBox 5"/>
-          <p:cNvSpPr txBox="1"/>
-          <p:nvPr/>
-        </p:nvSpPr>
-        <p:spPr>
-          <a:xfrm>
-            <a:off x="457200" y="1645920"/>
-            <a:ext cx="3931920" cy="4389120"/>
-          </a:xfrm>
-          <a:prstGeom prst="rect">
-            <a:avLst/>
-          </a:prstGeom>
-          <a:noFill/>
-        </p:spPr>
-        <p:txBody>
-          <a:bodyPr wrap="square">
-            <a:spAutoFit/>
-          </a:bodyPr>
-          <a:lstStyle/>
-          <a:p>
-            <a:pPr algn="l">
-              <a:lnSpc>
-                <a:spcPct val="130000"/>
-              </a:lnSpc>
-            </a:pPr>
-            <a:r>
-              <a:rPr sz="1000" b="1" i="0" u="none">
-                <a:solidFill>
-                  <a:srgbClr val="444444"/>
-                </a:solidFill>
-                <a:latin typeface="Segoe UI"/>
-              </a:rPr>
-              <a:t>1. Project Context &amp; Background 2. GSD + OMO Methodology</a:t>
-            </a:r>
-          </a:p>
-          <a:p>
-            <a:pPr algn="l">
-              <a:lnSpc>
-                <a:spcPct val="130000"/>
-              </a:lnSpc>
-            </a:pPr>
-            <a:r>
-              <a:rPr sz="1000" b="1" i="0" u="none">
-                <a:solidFill>
-                  <a:srgbClr val="444444"/>
-                </a:solidFill>
-                <a:latin typeface="Segoe UI"/>
-              </a:rPr>
-              <a:t>3. PoC Execution: 5 Waves 4. Infrastructure Validation</a:t>
-            </a:r>
-          </a:p>
-          <a:p>
-            <a:pPr algn="l">
-              <a:lnSpc>
-                <a:spcPct val="130000"/>
-              </a:lnSpc>
-            </a:pPr>
-            <a:r>
-              <a:rPr sz="1000" b="1" i="0" u="none">
-                <a:solidFill>
-                  <a:srgbClr val="444444"/>
-                </a:solidFill>
-                <a:latin typeface="Segoe UI"/>
-              </a:rPr>
-              <a:t>Results 5. DBaaS Architecture Patterns 6. Verification</a:t>
-            </a:r>
-          </a:p>
-          <a:p>
-            <a:pPr algn="l">
-              <a:lnSpc>
-                <a:spcPct val="130000"/>
-              </a:lnSpc>
-            </a:pPr>
-            <a:r>
-              <a:rPr sz="1000" b="1" i="0" u="none">
-                <a:solidFill>
-                  <a:srgbClr val="444444"/>
-                </a:solidFill>
-                <a:latin typeface="Segoe UI"/>
-              </a:rPr>
-              <a:t>Results (94.4%) 7. CASAN Framework Mapping 8. Process &amp;</a:t>
-            </a:r>
-          </a:p>
-          <a:p>
-            <a:pPr algn="l">
-              <a:lnSpc>
-                <a:spcPct val="130000"/>
-              </a:lnSpc>
-            </a:pPr>
-            <a:r>
-              <a:rPr sz="1000" b="1" i="0" u="none">
-                <a:solidFill>
-                  <a:srgbClr val="444444"/>
-                </a:solidFill>
-                <a:latin typeface="Segoe UI"/>
-              </a:rPr>
-              <a:t>Governance 9. Lessons Learned 10. Conclusion &amp; Next Steps</a:t>
-            </a:r>
-          </a:p>
-        </p:txBody>
-      </p:sp>
-      <p:sp>
-        <p:nvSpPr>
-          <p:cNvPr id="7" name="Rectangle 6"/>
-          <p:cNvSpPr/>
-          <p:nvPr/>
-        </p:nvSpPr>
-        <p:spPr>
-          <a:xfrm>
-            <a:off x="4754880" y="1463040"/>
-            <a:ext cx="3931920" cy="3657600"/>
-          </a:xfrm>
-          <a:prstGeom prst="rect">
-            <a:avLst/>
-          </a:prstGeom>
-        </p:spPr>
-        <p:style>
-          <a:lnRef idx="1">
-            <a:schemeClr val="accent1"/>
-          </a:lnRef>
-          <a:fillRef idx="3">
-            <a:schemeClr val="accent1"/>
-          </a:fillRef>
-          <a:effectRef idx="2">
-            <a:schemeClr val="accent1"/>
-          </a:effectRef>
-          <a:fontRef idx="minor">
-            <a:schemeClr val="lt1"/>
-          </a:fontRef>
-        </p:style>
-        <p:txBody>
-          <a:bodyPr rtlCol="0" anchor="ctr"/>
-          <a:lstStyle/>
-          <a:p>
-            <a:r>
-              <a:t>High-Impact Visual</a:t>
-            </a:r>
-          </a:p>
-        </p:txBody>
-      </p:sp>
-      <p:sp>
-        <p:nvSpPr>
-          <p:cNvPr id="8" name="Rectangle 7"/>
-          <p:cNvSpPr/>
-          <p:nvPr/>
-        </p:nvSpPr>
-        <p:spPr>
-          <a:xfrm>
-            <a:off x="4572000" y="1280160"/>
-            <a:ext cx="4297680" cy="4023360"/>
-          </a:xfrm>
-          <a:prstGeom prst="rect">
-            <a:avLst/>
-          </a:prstGeom>
-          <a:solidFill/>
-        </p:spPr>
-        <p:style>
-          <a:lnRef idx="1">
-            <a:schemeClr val="accent1"/>
-          </a:lnRef>
-          <a:fillRef idx="3">
-            <a:schemeClr val="accent1"/>
-          </a:fillRef>
-          <a:effectRef idx="2">
-            <a:schemeClr val="accent1"/>
-          </a:effectRef>
-          <a:fontRef idx="minor">
-            <a:schemeClr val="lt1"/>
-          </a:fontRef>
-        </p:style>
-        <p:txBody>
-          <a:bodyPr rtlCol="0" anchor="ctr"/>
-          <a:lstStyle/>
-          <a:p>
-            <a:pPr algn="ctr"/>
-          </a:p>
-        </p:txBody>
-      </p:sp>
-      <p:sp>
-        <p:nvSpPr>
-          <p:cNvPr id="9" name="TextBox 8"/>
-          <p:cNvSpPr txBox="1"/>
-          <p:nvPr/>
-        </p:nvSpPr>
-        <p:spPr>
-          <a:xfrm>
-            <a:off x="4572000" y="1280160"/>
-            <a:ext cx="4297680" cy="4023360"/>
-          </a:xfrm>
-          <a:prstGeom prst="rect">
-            <a:avLst/>
-          </a:prstGeom>
-          <a:noFill/>
-        </p:spPr>
-        <p:txBody>
-          <a:bodyPr wrap="none">
-            <a:spAutoFit/>
-          </a:bodyPr>
-          <a:lstStyle/>
-          <a:p>
-            <a:r>
-              <a:t>Shape: rectangle</a:t>
-            </a:r>
-          </a:p>
-        </p:txBody>
-      </p:sp>
-      <p:sp>
-        <p:nvSpPr>
-          <p:cNvPr id="10" name="TextBox 9"/>
-          <p:cNvSpPr txBox="1"/>
-          <p:nvPr/>
-        </p:nvSpPr>
-        <p:spPr>
-          <a:xfrm>
-            <a:off x="1828800" y="5486400"/>
-            <a:ext cx="5486400" cy="731520"/>
-          </a:xfrm>
-          <a:prstGeom prst="rect">
-            <a:avLst/>
-          </a:prstGeom>
-          <a:noFill/>
-        </p:spPr>
-        <p:txBody>
-          <a:bodyPr wrap="square">
-            <a:spAutoFit/>
-          </a:bodyPr>
-          <a:lstStyle/>
-          <a:p>
-            <a:pPr algn="ctr">
-              <a:lnSpc>
-                <a:spcPct val="120000"/>
-              </a:lnSpc>
-            </a:pPr>
-            <a:r>
-              <a:rPr sz="1400" b="1" i="1" u="none">
-                <a:solidFill>
-                  <a:srgbClr val="FFC000"/>
-                </a:solidFill>
-                <a:latin typeface="Segoe UI Semibold"/>
-              </a:rPr>
-              <a:t>Ready to Transform? Let's Begin!</a:t>
+          <a:p>
+            <a:pPr/>
+            <a:r>
+              <a:t>Executive Summary</a:t>
+            </a:r>
+          </a:p>
+          <a:p>
+            <a:pPr/>
+            <a:r>
+              <a:t>Project Context &amp; Objectives</a:t>
+            </a:r>
+          </a:p>
+          <a:p>
+            <a:pPr/>
+            <a:r>
+              <a:t>Methodology: GSD + OMO</a:t>
+            </a:r>
+          </a:p>
+          <a:p>
+            <a:pPr/>
+            <a:r>
+              <a:t>Why GSD/OMO Over GitHub Copilot</a:t>
+            </a:r>
+          </a:p>
+          <a:p>
+            <a:pPr/>
+            <a:r>
+              <a:t>GSD/OMO Enablers</a:t>
+            </a:r>
+          </a:p>
+          <a:p>
+            <a:pPr/>
+            <a:r>
+              <a:t>Technical Challenges</a:t>
+            </a:r>
+          </a:p>
+          <a:p>
+            <a:pPr/>
+            <a:r>
+              <a:t>AI-Augmented Repetitive Work</a:t>
+            </a:r>
+          </a:p>
+          <a:p>
+            <a:pPr/>
+            <a:r>
+              <a:t>GSD Execution Waves</a:t>
+            </a:r>
+          </a:p>
+          <a:p>
+            <a:pPr/>
+            <a:r>
+              <a:t>Infrastructure Validation Results</a:t>
+            </a:r>
+          </a:p>
+          <a:p>
+            <a:pPr/>
+            <a:r>
+              <a:t>DBaaS Architecture Patterns</a:t>
+            </a:r>
+          </a:p>
+          <a:p>
+            <a:pPr/>
+            <a:r>
+              <a:t>Verification Results (94.4%)</a:t>
+            </a:r>
+          </a:p>
+          <a:p>
+            <a:pPr/>
+            <a:r>
+              <a:t>CASAN Framework Mapping</a:t>
+            </a:r>
+          </a:p>
+          <a:p>
+            <a:pPr/>
+            <a:r>
+              <a:t>Formal Handoffs</a:t>
+            </a:r>
+          </a:p>
+          <a:p>
+            <a:pPr/>
+            <a:r>
+              <a:t>Lessons Learned</a:t>
+            </a:r>
+          </a:p>
+          <a:p>
+            <a:pPr/>
+            <a:r>
+              <a:t>Conclusion &amp; Next Steps</a:t>
             </a:r>
           </a:p>
         </p:txBody>
@@ -5106,7 +3366,7 @@
           <a:lstStyle/>
           <a:p>
             <a:r>
-              <a:t>Project Context &amp;amp; Background</a:t>
+              <a:t>Methodology: GSD + OMO</a:t>
             </a:r>
           </a:p>
         </p:txBody>
@@ -5129,31 +3389,19 @@
           <a:p>
             <a:pPr/>
             <a:r>
-              <a:t>Goal: Validate RHOSO DBaaS architecture feasibility</a:t>
+              <a:t>Multi-agent orchestration platform</a:t>
             </a:r>
           </a:p>
           <a:p>
             <a:pPr/>
             <a:r>
-              <a:t>Scope: Document-based validation from openstack-101 knowledge base</a:t>
+              <a:t>Category-based routing to specialized AI models</a:t>
             </a:r>
           </a:p>
           <a:p>
             <a:pPr/>
             <a:r>
-              <a:t>Methodology: GSD Waves + OMO Agent Categories</a:t>
-            </a:r>
-          </a:p>
-          <a:p>
-            <a:pPr/>
-            <a:r>
-              <a:t>Framework: Aligned to FPT CASAN AI Maturity Model</a:t>
-            </a:r>
-          </a:p>
-          <a:p>
-            <a:pPr/>
-            <a:r>
-              <a:t>Duration: 5 Waves, 11 Tasks, completed in ~5 hours</a:t>
+              <a:t>Context persistence via notepads and handoffs</a:t>
             </a:r>
           </a:p>
         </p:txBody>
@@ -5166,8 +3414,8 @@
         </p:nvSpPr>
         <p:spPr>
           <a:xfrm>
-            <a:off x="457200" y="1371600"/>
-            <a:ext cx="8229600" cy="1371600"/>
+            <a:off x="914400" y="1371600"/>
+            <a:ext cx="3657600" cy="457200"/>
           </a:xfrm>
           <a:prstGeom prst="rect">
             <a:avLst/>
@@ -5175,83 +3423,28 @@
           <a:noFill/>
         </p:spPr>
         <p:txBody>
-          <a:bodyPr wrap="none">
+          <a:bodyPr wrap="square">
             <a:spAutoFit/>
           </a:bodyPr>
           <a:lstStyle/>
           <a:p>
             <a:r>
-              <a:t>Project Context: Greenfield OpenStack RHOSO DBaaS PoC executed by FPT AI-in-SDLC team with zero prior OpenStack knowledge. The team used GSD (Get Shit Done Redux) methodology with OMO (Oh My OpenAgent) AI orchestration to deliver a complete DBaaS architecture validation within 1 day.</a:t>
-            </a:r>
-          </a:p>
-        </p:txBody>
-      </p:sp>
-    </p:spTree>
-  </p:cSld>
-  <p:clrMapOvr>
-    <a:masterClrMapping/>
-  </p:clrMapOvr>
-</p:sld>
-</file>
-
-<file path=ppt/slides/slide4.xml><?xml version="1.0" encoding="utf-8"?>
-<p:sld xmlns:a="http://schemas.openxmlformats.org/drawingml/2006/main" xmlns:p="http://schemas.openxmlformats.org/presentationml/2006/main" xmlns:r="http://schemas.openxmlformats.org/officeDocument/2006/relationships">
-  <p:cSld>
-    <p:spTree>
-      <p:nvGrpSpPr>
-        <p:cNvPr id="1" name=""/>
-        <p:cNvGrpSpPr/>
-        <p:nvPr/>
-      </p:nvGrpSpPr>
-      <p:grpSpPr/>
-      <p:sp>
-        <p:nvSpPr>
-          <p:cNvPr id="2" name="Title 1"/>
-          <p:cNvSpPr>
-            <a:spLocks noGrp="1"/>
-          </p:cNvSpPr>
-          <p:nvPr>
-            <p:ph type="title"/>
-          </p:nvPr>
-        </p:nvSpPr>
-        <p:spPr/>
-        <p:txBody>
-          <a:bodyPr/>
-          <a:lstStyle/>
-          <a:p>
-            <a:r>
-              <a:t>What is RHOSO DBaaS?</a:t>
-            </a:r>
-          </a:p>
-        </p:txBody>
-      </p:sp>
-      <p:sp>
-        <p:nvSpPr>
-          <p:cNvPr id="3" name="Content Placeholder 2"/>
-          <p:cNvSpPr>
-            <a:spLocks noGrp="1"/>
-          </p:cNvSpPr>
-          <p:nvPr>
-            <p:ph idx="1"/>
-          </p:nvPr>
-        </p:nvSpPr>
-        <p:spPr/>
-        <p:txBody>
-          <a:bodyPr/>
-          <a:lstStyle/>
-          <a:p/>
-        </p:txBody>
-      </p:sp>
-      <p:sp>
-        <p:nvSpPr>
-          <p:cNvPr id="4" name="TextBox 3"/>
+              <a:rPr sz="1800" b="1"/>
+              <a:t>GSD (Get Shit Done Redux)</a:t>
+            </a:r>
+          </a:p>
+        </p:txBody>
+      </p:sp>
+      <p:sp>
+        <p:nvSpPr>
+          <p:cNvPr id="5" name="TextBox 4"/>
           <p:cNvSpPr txBox="1"/>
           <p:nvPr/>
         </p:nvSpPr>
         <p:spPr>
           <a:xfrm>
-            <a:off x="457200" y="1371600"/>
-            <a:ext cx="8229600" cy="3657600"/>
+            <a:off x="5029200" y="1371600"/>
+            <a:ext cx="3657600" cy="457200"/>
           </a:xfrm>
           <a:prstGeom prst="rect">
             <a:avLst/>
@@ -5259,1355 +3452,18 @@
           <a:noFill/>
         </p:spPr>
         <p:txBody>
-          <a:bodyPr wrap="none">
+          <a:bodyPr wrap="square">
             <a:spAutoFit/>
           </a:bodyPr>
           <a:lstStyle/>
           <a:p>
             <a:r>
-              <a:t>OpenStack: Open-source IaaS platform (Nova, Neutron, Keystone, Cinder, Glance)\n\nRHOSO (Red Hat OpenStack Services on OpenShift): Container-native control plane on OpenShift 4.18+, managed by Kubernetes Operators\n\nDBaaS: Database-as-a-Service via Trove (native) or cloud-native Operators\n\nKey Technologies: PostgreSQL 16, Patroni HA, etcd DCS, pgBackRest, OVN networking, Ceph 8 storage</a:t>
-            </a:r>
-          </a:p>
-        </p:txBody>
-      </p:sp>
-    </p:spTree>
-  </p:cSld>
-  <p:clrMapOvr>
-    <a:masterClrMapping/>
-  </p:clrMapOvr>
-</p:sld>
-</file>
-
-<file path=ppt/slides/slide5.xml><?xml version="1.0" encoding="utf-8"?>
-<p:sld xmlns:a="http://schemas.openxmlformats.org/drawingml/2006/main" xmlns:p="http://schemas.openxmlformats.org/presentationml/2006/main" xmlns:r="http://schemas.openxmlformats.org/officeDocument/2006/relationships">
-  <p:cSld>
-    <p:spTree>
-      <p:nvGrpSpPr>
-        <p:cNvPr id="1" name=""/>
-        <p:cNvGrpSpPr/>
-        <p:nvPr/>
-      </p:nvGrpSpPr>
-      <p:grpSpPr/>
-      <p:sp>
-        <p:nvSpPr>
-          <p:cNvPr id="2" name="Title 1"/>
-          <p:cNvSpPr>
-            <a:spLocks noGrp="1"/>
-          </p:cNvSpPr>
-          <p:nvPr>
-            <p:ph type="title"/>
-          </p:nvPr>
-        </p:nvSpPr>
-        <p:spPr/>
-        <p:txBody>
-          <a:bodyPr/>
-          <a:lstStyle/>
-          <a:p>
-            <a:r>
-              <a:t>Methodology: GSD + OMO</a:t>
-            </a:r>
-          </a:p>
-        </p:txBody>
-      </p:sp>
-      <p:sp>
-        <p:nvSpPr>
-          <p:cNvPr id="3" name="Content Placeholder 2"/>
-          <p:cNvSpPr>
-            <a:spLocks noGrp="1"/>
-          </p:cNvSpPr>
-          <p:nvPr>
-            <p:ph idx="1"/>
-          </p:nvPr>
-        </p:nvSpPr>
-        <p:spPr/>
-        <p:txBody>
-          <a:bodyPr/>
-          <a:lstStyle/>
-          <a:p/>
-        </p:txBody>
-      </p:sp>
-      <p:sp>
-        <p:nvSpPr>
-          <p:cNvPr id="4" name="TextBox 3"/>
-          <p:cNvSpPr txBox="1"/>
-          <p:nvPr/>
-        </p:nvSpPr>
-        <p:spPr>
-          <a:xfrm>
-            <a:off x="457200" y="1371600"/>
-            <a:ext cx="8229600" cy="3657600"/>
-          </a:xfrm>
-          <a:prstGeom prst="rect">
-            <a:avLst/>
-          </a:prstGeom>
-          <a:noFill/>
-        </p:spPr>
-        <p:txBody>
-          <a:bodyPr wrap="none">
-            <a:spAutoFit/>
-          </a:bodyPr>
-          <a:lstStyle/>
-          <a:p>
-            <a:r>
-              <a:t>GSD (Get Shit Done Redux): Structured AI-assisted execution framework\n  • Wave Planning with dependency matrices\n  • Parallel execution maximizing throughput\n  • Evidence-based verification gates\n\nOMO (Oh My OpenAgent): AI orchestration platform\n  • Agent categories: quick, deep, writing, unspecified-high\n  • Skills: git-master, understand, understand-chat\n  • Sub-agent delegation with QA verification loops\n\nCombined Workflow: Prometheus (Plan) → Sisyphus (Execute) → QA (Verify)</a:t>
-            </a:r>
-          </a:p>
-        </p:txBody>
-      </p:sp>
-    </p:spTree>
-  </p:cSld>
-  <p:clrMapOvr>
-    <a:masterClrMapping/>
-  </p:clrMapOvr>
-</p:sld>
-</file>
-
-<file path=ppt/slides/slide6.xml><?xml version="1.0" encoding="utf-8"?>
-<p:sld xmlns:a="http://schemas.openxmlformats.org/drawingml/2006/main" xmlns:p="http://schemas.openxmlformats.org/presentationml/2006/main" xmlns:r="http://schemas.openxmlformats.org/officeDocument/2006/relationships">
-  <p:cSld>
-    <p:spTree>
-      <p:nvGrpSpPr>
-        <p:cNvPr id="1" name=""/>
-        <p:cNvGrpSpPr/>
-        <p:nvPr/>
-      </p:nvGrpSpPr>
-      <p:grpSpPr/>
-      <p:sp>
-        <p:nvSpPr>
-          <p:cNvPr id="2" name="Title 1"/>
-          <p:cNvSpPr>
-            <a:spLocks noGrp="1"/>
-          </p:cNvSpPr>
-          <p:nvPr>
-            <p:ph type="title"/>
-          </p:nvPr>
-        </p:nvSpPr>
-        <p:spPr/>
-        <p:txBody>
-          <a:bodyPr/>
-          <a:lstStyle/>
-          <a:p>
-            <a:r>
-              <a:t>Slide 6</a:t>
-            </a:r>
-          </a:p>
-        </p:txBody>
-      </p:sp>
-      <p:sp>
-        <p:nvSpPr>
-          <p:cNvPr id="3" name="Content Placeholder 2"/>
-          <p:cNvSpPr>
-            <a:spLocks noGrp="1"/>
-          </p:cNvSpPr>
-          <p:nvPr>
-            <p:ph idx="1"/>
-          </p:nvPr>
-        </p:nvSpPr>
-        <p:spPr/>
-        <p:txBody>
-          <a:bodyPr/>
-          <a:lstStyle/>
-          <a:p/>
-        </p:txBody>
-      </p:sp>
-      <p:graphicFrame>
-        <p:nvGraphicFramePr>
-          <p:cNvPr id="4" name="Table 3"/>
-          <p:cNvGraphicFramePr>
-            <a:graphicFrameLocks noGrp="1"/>
-          </p:cNvGraphicFramePr>
-          <p:nvPr/>
-        </p:nvGraphicFramePr>
-        <p:xfrm>
-          <a:off x="457200" y="1371600"/>
-          <a:ext cx="8229600" cy="3657600"/>
-        </p:xfrm>
-        <a:graphic>
-          <a:graphicData uri="http://schemas.openxmlformats.org/drawingml/2006/table">
-            <a:tbl>
-              <a:tblPr firstRow="1" bandRow="1">
-                <a:tableStyleId>{5C22544A-7EE6-4342-B048-85BDC9FD1C3A}</a:tableStyleId>
-              </a:tblPr>
-              <a:tblGrid>
-                <a:gridCol w="2057400"/>
-                <a:gridCol w="2057400"/>
-                <a:gridCol w="2057400"/>
-                <a:gridCol w="2057400"/>
-              </a:tblGrid>
-              <a:tr h="609600">
-                <a:tc>
-                  <a:txBody>
-                    <a:bodyPr wrap="square"/>
-                    <a:lstStyle/>
-                    <a:p>
-                      <a:r>
-                        <a:rPr sz="1200" b="1"/>
-                        <a:t>Wave</a:t>
-                      </a:r>
-                    </a:p>
-                  </a:txBody>
-                  <a:tcPr/>
-                </a:tc>
-                <a:tc>
-                  <a:txBody>
-                    <a:bodyPr wrap="square"/>
-                    <a:lstStyle/>
-                    <a:p>
-                      <a:r>
-                        <a:rPr sz="1200" b="1"/>
-                        <a:t>Tasks</a:t>
-                      </a:r>
-                    </a:p>
-                  </a:txBody>
-                  <a:tcPr/>
-                </a:tc>
-                <a:tc>
-                  <a:txBody>
-                    <a:bodyPr wrap="square"/>
-                    <a:lstStyle/>
-                    <a:p>
-                      <a:r>
-                        <a:rPr sz="1200" b="1"/>
-                        <a:t>Parallel</a:t>
-                      </a:r>
-                    </a:p>
-                  </a:txBody>
-                  <a:tcPr/>
-                </a:tc>
-                <a:tc>
-                  <a:txBody>
-                    <a:bodyPr wrap="square"/>
-                    <a:lstStyle/>
-                    <a:p>
-                      <a:r>
-                        <a:rPr sz="1200" b="1"/>
-                        <a:t>Key Deliverables</a:t>
-                      </a:r>
-                    </a:p>
-                  </a:txBody>
-                  <a:tcPr/>
-                </a:tc>
-              </a:tr>
-              <a:tr h="609600">
-                <a:tc>
-                  <a:txBody>
-                    <a:bodyPr wrap="square"/>
-                    <a:lstStyle/>
-                    <a:p>
-                      <a:r>
-                        <a:rPr sz="1000"/>
-                        <a:t>Wave 1: Foundation</a:t>
-                      </a:r>
-                    </a:p>
-                  </a:txBody>
-                  <a:tcPr/>
-                </a:tc>
-                <a:tc>
-                  <a:txBody>
-                    <a:bodyPr wrap="square"/>
-                    <a:lstStyle/>
-                    <a:p>
-                      <a:r>
-                        <a:rPr sz="1000"/>
-                        <a:t>T1,T2,T3</a:t>
-                      </a:r>
-                    </a:p>
-                  </a:txBody>
-                  <a:tcPr/>
-                </a:tc>
-                <a:tc>
-                  <a:txBody>
-                    <a:bodyPr wrap="square"/>
-                    <a:lstStyle/>
-                    <a:p>
-                      <a:r>
-                        <a:rPr sz="1000"/>
-                        <a:t>Yes (3)</a:t>
-                      </a:r>
-                    </a:p>
-                  </a:txBody>
-                  <a:tcPr/>
-                </a:tc>
-                <a:tc>
-                  <a:txBody>
-                    <a:bodyPr wrap="square"/>
-                    <a:lstStyle/>
-                    <a:p>
-                      <a:r>
-                        <a:rPr sz="1000"/>
-                        <a:t>Env validation, OpenStack baseline, CASAN rubric</a:t>
-                      </a:r>
-                    </a:p>
-                  </a:txBody>
-                  <a:tcPr/>
-                </a:tc>
-              </a:tr>
-              <a:tr h="609600">
-                <a:tc>
-                  <a:txBody>
-                    <a:bodyPr wrap="square"/>
-                    <a:lstStyle/>
-                    <a:p>
-                      <a:r>
-                        <a:rPr sz="1000"/>
-                        <a:t>Wave 2: Setup</a:t>
-                      </a:r>
-                    </a:p>
-                  </a:txBody>
-                  <a:tcPr/>
-                </a:tc>
-                <a:tc>
-                  <a:txBody>
-                    <a:bodyPr wrap="square"/>
-                    <a:lstStyle/>
-                    <a:p>
-                      <a:r>
-                        <a:rPr sz="1000"/>
-                        <a:t>T4,T5</a:t>
-                      </a:r>
-                    </a:p>
-                  </a:txBody>
-                  <a:tcPr/>
-                </a:tc>
-                <a:tc>
-                  <a:txBody>
-                    <a:bodyPr wrap="square"/>
-                    <a:lstStyle/>
-                    <a:p>
-                      <a:r>
-                        <a:rPr sz="1000"/>
-                        <a:t>Yes (2)</a:t>
-                      </a:r>
-                    </a:p>
-                  </a:txBody>
-                  <a:tcPr/>
-                </a:tc>
-                <a:tc>
-                  <a:txBody>
-                    <a:bodyPr wrap="square"/>
-                    <a:lstStyle/>
-                    <a:p>
-                      <a:r>
-                        <a:rPr sz="1000"/>
-                        <a:t>Case study template, RHOSO env docs</a:t>
-                      </a:r>
-                    </a:p>
-                  </a:txBody>
-                  <a:tcPr/>
-                </a:tc>
-              </a:tr>
-              <a:tr h="609600">
-                <a:tc>
-                  <a:txBody>
-                    <a:bodyPr wrap="square"/>
-                    <a:lstStyle/>
-                    <a:p>
-                      <a:r>
-                        <a:rPr sz="1000"/>
-                        <a:t>Wave 3: Process</a:t>
-                      </a:r>
-                    </a:p>
-                  </a:txBody>
-                  <a:tcPr/>
-                </a:tc>
-                <a:tc>
-                  <a:txBody>
-                    <a:bodyPr wrap="square"/>
-                    <a:lstStyle/>
-                    <a:p>
-                      <a:r>
-                        <a:rPr sz="1000"/>
-                        <a:t>T6,T7</a:t>
-                      </a:r>
-                    </a:p>
-                  </a:txBody>
-                  <a:tcPr/>
-                </a:tc>
-                <a:tc>
-                  <a:txBody>
-                    <a:bodyPr wrap="square"/>
-                    <a:lstStyle/>
-                    <a:p>
-                      <a:r>
-                        <a:rPr sz="1000"/>
-                        <a:t>Yes (2)</a:t>
-                      </a:r>
-                    </a:p>
-                  </a:txBody>
-                  <a:tcPr/>
-                </a:tc>
-                <a:tc>
-                  <a:txBody>
-                    <a:bodyPr wrap="square"/>
-                    <a:lstStyle/>
-                    <a:p>
-                      <a:r>
-                        <a:rPr sz="1000"/>
-                        <a:t>DBaaS deployment docs, Execution log + Handoffs</a:t>
-                      </a:r>
-                    </a:p>
-                  </a:txBody>
-                  <a:tcPr/>
-                </a:tc>
-              </a:tr>
-              <a:tr h="609600">
-                <a:tc>
-                  <a:txBody>
-                    <a:bodyPr wrap="square"/>
-                    <a:lstStyle/>
-                    <a:p>
-                      <a:r>
-                        <a:rPr sz="1000"/>
-                        <a:t>Wave 4: Verify</a:t>
-                      </a:r>
-                    </a:p>
-                  </a:txBody>
-                  <a:tcPr/>
-                </a:tc>
-                <a:tc>
-                  <a:txBody>
-                    <a:bodyPr wrap="square"/>
-                    <a:lstStyle/>
-                    <a:p>
-                      <a:r>
-                        <a:rPr sz="1000"/>
-                        <a:t>T8,T9,T10</a:t>
-                      </a:r>
-                    </a:p>
-                  </a:txBody>
-                  <a:tcPr/>
-                </a:tc>
-                <a:tc>
-                  <a:txBody>
-                    <a:bodyPr wrap="square"/>
-                    <a:lstStyle/>
-                    <a:p>
-                      <a:r>
-                        <a:rPr sz="1000"/>
-                        <a:t>Yes (3)</a:t>
-                      </a:r>
-                    </a:p>
-                  </a:txBody>
-                  <a:tcPr/>
-                </a:tc>
-                <a:tc>
-                  <a:txBody>
-                    <a:bodyPr wrap="square"/>
-                    <a:lstStyle/>
-                    <a:p>
-                      <a:r>
-                        <a:rPr sz="1000"/>
-                        <a:t>QA verification, CASAN mapping, Handoff register</a:t>
-                      </a:r>
-                    </a:p>
-                  </a:txBody>
-                  <a:tcPr/>
-                </a:tc>
-              </a:tr>
-              <a:tr h="609600">
-                <a:tc>
-                  <a:txBody>
-                    <a:bodyPr wrap="square"/>
-                    <a:lstStyle/>
-                    <a:p>
-                      <a:r>
-                        <a:rPr sz="1000"/>
-                        <a:t>Wave 5: Assembly</a:t>
-                      </a:r>
-                    </a:p>
-                  </a:txBody>
-                  <a:tcPr/>
-                </a:tc>
-                <a:tc>
-                  <a:txBody>
-                    <a:bodyPr wrap="square"/>
-                    <a:lstStyle/>
-                    <a:p>
-                      <a:r>
-                        <a:rPr sz="1000"/>
-                        <a:t>T11</a:t>
-                      </a:r>
-                    </a:p>
-                  </a:txBody>
-                  <a:tcPr/>
-                </a:tc>
-                <a:tc>
-                  <a:txBody>
-                    <a:bodyPr wrap="square"/>
-                    <a:lstStyle/>
-                    <a:p>
-                      <a:r>
-                        <a:rPr sz="1000"/>
-                        <a:t>No</a:t>
-                      </a:r>
-                    </a:p>
-                  </a:txBody>
-                  <a:tcPr/>
-                </a:tc>
-                <a:tc>
-                  <a:txBody>
-                    <a:bodyPr wrap="square"/>
-                    <a:lstStyle/>
-                    <a:p>
-                      <a:r>
-                        <a:rPr sz="1000"/>
-                        <a:t>Final case study document (713 lines)</a:t>
-                      </a:r>
-                    </a:p>
-                  </a:txBody>
-                  <a:tcPr/>
-                </a:tc>
-              </a:tr>
-            </a:tbl>
-          </a:graphicData>
-        </a:graphic>
-      </p:graphicFrame>
-    </p:spTree>
-  </p:cSld>
-  <p:clrMapOvr>
-    <a:masterClrMapping/>
-  </p:clrMapOvr>
-</p:sld>
-</file>
-
-<file path=ppt/slides/slide7.xml><?xml version="1.0" encoding="utf-8"?>
-<p:sld xmlns:a="http://schemas.openxmlformats.org/drawingml/2006/main" xmlns:p="http://schemas.openxmlformats.org/presentationml/2006/main" xmlns:r="http://schemas.openxmlformats.org/officeDocument/2006/relationships">
-  <p:cSld>
-    <p:spTree>
-      <p:nvGrpSpPr>
-        <p:cNvPr id="1" name=""/>
-        <p:cNvGrpSpPr/>
-        <p:nvPr/>
-      </p:nvGrpSpPr>
-      <p:grpSpPr/>
-      <p:sp>
-        <p:nvSpPr>
-          <p:cNvPr id="2" name="Title 1"/>
-          <p:cNvSpPr>
-            <a:spLocks noGrp="1"/>
-          </p:cNvSpPr>
-          <p:nvPr>
-            <p:ph type="title"/>
-          </p:nvPr>
-        </p:nvSpPr>
-        <p:spPr/>
-        <p:txBody>
-          <a:bodyPr/>
-          <a:lstStyle/>
-          <a:p>
-            <a:r>
-              <a:t>GSD Execution Waves</a:t>
-            </a:r>
-          </a:p>
-        </p:txBody>
-      </p:sp>
-      <p:sp>
-        <p:nvSpPr>
-          <p:cNvPr id="3" name="Content Placeholder 2"/>
-          <p:cNvSpPr>
-            <a:spLocks noGrp="1"/>
-          </p:cNvSpPr>
-          <p:nvPr>
-            <p:ph idx="1"/>
-          </p:nvPr>
-        </p:nvSpPr>
-        <p:spPr/>
-        <p:txBody>
-          <a:bodyPr/>
-          <a:lstStyle/>
-          <a:p/>
-        </p:txBody>
-      </p:sp>
-      <p:graphicFrame>
-        <p:nvGraphicFramePr>
-          <p:cNvPr id="4" name="Table 3"/>
-          <p:cNvGraphicFramePr>
-            <a:graphicFrameLocks noGrp="1"/>
-          </p:cNvGraphicFramePr>
-          <p:nvPr/>
-        </p:nvGraphicFramePr>
-        <p:xfrm>
-          <a:off x="457200" y="1371600"/>
-          <a:ext cx="8229600" cy="3657600"/>
-        </p:xfrm>
-        <a:graphic>
-          <a:graphicData uri="http://schemas.openxmlformats.org/drawingml/2006/table">
-            <a:tbl>
-              <a:tblPr firstRow="1" bandRow="1">
-                <a:tableStyleId>{5C22544A-7EE6-4342-B048-85BDC9FD1C3A}</a:tableStyleId>
-              </a:tblPr>
-              <a:tblGrid>
-                <a:gridCol w="2057400"/>
-                <a:gridCol w="2057400"/>
-                <a:gridCol w="2057400"/>
-                <a:gridCol w="2057400"/>
-              </a:tblGrid>
-              <a:tr h="522514">
-                <a:tc>
-                  <a:txBody>
-                    <a:bodyPr wrap="square"/>
-                    <a:lstStyle/>
-                    <a:p>
-                      <a:r>
-                        <a:rPr sz="1200" b="1"/>
-                        <a:t>Category</a:t>
-                      </a:r>
-                    </a:p>
-                  </a:txBody>
-                  <a:tcPr/>
-                </a:tc>
-                <a:tc>
-                  <a:txBody>
-                    <a:bodyPr wrap="square"/>
-                    <a:lstStyle/>
-                    <a:p>
-                      <a:r>
-                        <a:rPr sz="1200" b="1"/>
-                        <a:t>Pass Rate</a:t>
-                      </a:r>
-                    </a:p>
-                  </a:txBody>
-                  <a:tcPr/>
-                </a:tc>
-                <a:tc>
-                  <a:txBody>
-                    <a:bodyPr wrap="square"/>
-                    <a:lstStyle/>
-                    <a:p>
-                      <a:r>
-                        <a:rPr sz="1200" b="1"/>
-                        <a:t>Details</a:t>
-                      </a:r>
-                    </a:p>
-                  </a:txBody>
-                  <a:tcPr/>
-                </a:tc>
-                <a:tc>
-                  <a:txBody>
-                    <a:bodyPr wrap="square"/>
-                    <a:lstStyle/>
-                    <a:p>
-                      <a:r>
-                        <a:rPr sz="1200" b="1"/>
-                        <a:t>Verdict</a:t>
-                      </a:r>
-                    </a:p>
-                  </a:txBody>
-                  <a:tcPr/>
-                </a:tc>
-              </a:tr>
-              <a:tr h="522514">
-                <a:tc>
-                  <a:txBody>
-                    <a:bodyPr wrap="square"/>
-                    <a:lstStyle/>
-                    <a:p>
-                      <a:r>
-                        <a:rPr sz="1000"/>
-                        <a:t>Architecture</a:t>
-                      </a:r>
-                    </a:p>
-                  </a:txBody>
-                  <a:tcPr/>
-                </a:tc>
-                <a:tc>
-                  <a:txBody>
-                    <a:bodyPr wrap="square"/>
-                    <a:lstStyle/>
-                    <a:p>
-                      <a:r>
-                        <a:rPr sz="1000"/>
-                        <a:t>8/8 (100%)</a:t>
-                      </a:r>
-                    </a:p>
-                  </a:txBody>
-                  <a:tcPr/>
-                </a:tc>
-                <a:tc>
-                  <a:txBody>
-                    <a:bodyPr wrap="square"/>
-                    <a:lstStyle/>
-                    <a:p>
-                      <a:r>
-                        <a:rPr sz="1000"/>
-                        <a:t>ADRs, HA/Network/Storage reference designs</a:t>
-                      </a:r>
-                    </a:p>
-                  </a:txBody>
-                  <a:tcPr/>
-                </a:tc>
-                <a:tc>
-                  <a:txBody>
-                    <a:bodyPr wrap="square"/>
-                    <a:lstStyle/>
-                    <a:p>
-                      <a:r>
-                        <a:rPr sz="1000"/>
-                        <a:t>PASS</a:t>
-                      </a:r>
-                    </a:p>
-                  </a:txBody>
-                  <a:tcPr/>
-                </a:tc>
-              </a:tr>
-              <a:tr h="522514">
-                <a:tc>
-                  <a:txBody>
-                    <a:bodyPr wrap="square"/>
-                    <a:lstStyle/>
-                    <a:p>
-                      <a:r>
-                        <a:rPr sz="1000"/>
-                        <a:t>Deployment</a:t>
-                      </a:r>
-                    </a:p>
-                  </a:txBody>
-                  <a:tcPr/>
-                </a:tc>
-                <a:tc>
-                  <a:txBody>
-                    <a:bodyPr wrap="square"/>
-                    <a:lstStyle/>
-                    <a:p>
-                      <a:r>
-                        <a:rPr sz="1000"/>
-                        <a:t>15/17 (88%)</a:t>
-                      </a:r>
-                    </a:p>
-                  </a:txBody>
-                  <a:tcPr/>
-                </a:tc>
-                <a:tc>
-                  <a:txBody>
-                    <a:bodyPr wrap="square"/>
-                    <a:lstStyle/>
-                    <a:p>
-                      <a:r>
-                        <a:rPr sz="1000"/>
-                        <a:t>34+ DBaaS deliverables, AWS env, capacity plan</a:t>
-                      </a:r>
-                    </a:p>
-                  </a:txBody>
-                  <a:tcPr/>
-                </a:tc>
-                <a:tc>
-                  <a:txBody>
-                    <a:bodyPr wrap="square"/>
-                    <a:lstStyle/>
-                    <a:p>
-                      <a:r>
-                        <a:rPr sz="1000"/>
-                        <a:t>PASS</a:t>
-                      </a:r>
-                    </a:p>
-                  </a:txBody>
-                  <a:tcPr/>
-                </a:tc>
-              </a:tr>
-              <a:tr h="522514">
-                <a:tc>
-                  <a:txBody>
-                    <a:bodyPr wrap="square"/>
-                    <a:lstStyle/>
-                    <a:p>
-                      <a:r>
-                        <a:rPr sz="1000"/>
-                        <a:t>Core Services</a:t>
-                      </a:r>
-                    </a:p>
-                  </a:txBody>
-                  <a:tcPr/>
-                </a:tc>
-                <a:tc>
-                  <a:txBody>
-                    <a:bodyPr wrap="square"/>
-                    <a:lstStyle/>
-                    <a:p>
-                      <a:r>
-                        <a:rPr sz="1000"/>
-                        <a:t>5/5 (100%)</a:t>
-                      </a:r>
-                    </a:p>
-                  </a:txBody>
-                  <a:tcPr/>
-                </a:tc>
-                <a:tc>
-                  <a:txBody>
-                    <a:bodyPr wrap="square"/>
-                    <a:lstStyle/>
-                    <a:p>
-                      <a:r>
-                        <a:rPr sz="1000"/>
-                        <a:t>Nova, Neutron, Cinder, Glance, Keystone</a:t>
-                      </a:r>
-                    </a:p>
-                  </a:txBody>
-                  <a:tcPr/>
-                </a:tc>
-                <a:tc>
-                  <a:txBody>
-                    <a:bodyPr wrap="square"/>
-                    <a:lstStyle/>
-                    <a:p>
-                      <a:r>
-                        <a:rPr sz="1000"/>
-                        <a:t>PASS</a:t>
-                      </a:r>
-                    </a:p>
-                  </a:txBody>
-                  <a:tcPr/>
-                </a:tc>
-              </a:tr>
-              <a:tr h="522514">
-                <a:tc>
-                  <a:txBody>
-                    <a:bodyPr wrap="square"/>
-                    <a:lstStyle/>
-                    <a:p>
-                      <a:r>
-                        <a:rPr sz="1000"/>
-                        <a:t>Operations</a:t>
-                      </a:r>
-                    </a:p>
-                  </a:txBody>
-                  <a:tcPr/>
-                </a:tc>
-                <a:tc>
-                  <a:txBody>
-                    <a:bodyPr wrap="square"/>
-                    <a:lstStyle/>
-                    <a:p>
-                      <a:r>
-                        <a:rPr sz="1000"/>
-                        <a:t>7/7 (100%)</a:t>
-                      </a:r>
-                    </a:p>
-                  </a:txBody>
-                  <a:tcPr/>
-                </a:tc>
-                <a:tc>
-                  <a:txBody>
-                    <a:bodyPr wrap="square"/>
-                    <a:lstStyle/>
-                    <a:p>
-                      <a:r>
-                        <a:rPr sz="1000"/>
-                        <a:t>Backup, Monitoring, Security, Runbooks</a:t>
-                      </a:r>
-                    </a:p>
-                  </a:txBody>
-                  <a:tcPr/>
-                </a:tc>
-                <a:tc>
-                  <a:txBody>
-                    <a:bodyPr wrap="square"/>
-                    <a:lstStyle/>
-                    <a:p>
-                      <a:r>
-                        <a:rPr sz="1000"/>
-                        <a:t>PASS</a:t>
-                      </a:r>
-                    </a:p>
-                  </a:txBody>
-                  <a:tcPr/>
-                </a:tc>
-              </a:tr>
-              <a:tr h="522514">
-                <a:tc>
-                  <a:txBody>
-                    <a:bodyPr wrap="square"/>
-                    <a:lstStyle/>
-                    <a:p>
-                      <a:r>
-                        <a:rPr sz="1000"/>
-                        <a:t>FPT Cloud Docs</a:t>
-                      </a:r>
-                    </a:p>
-                  </a:txBody>
-                  <a:tcPr/>
-                </a:tc>
-                <a:tc>
-                  <a:txBody>
-                    <a:bodyPr wrap="square"/>
-                    <a:lstStyle/>
-                    <a:p>
-                      <a:r>
-                        <a:rPr sz="1000"/>
-                        <a:t>10/10 (100%)</a:t>
-                      </a:r>
-                    </a:p>
-                  </a:txBody>
-                  <a:tcPr/>
-                </a:tc>
-                <a:tc>
-                  <a:txBody>
-                    <a:bodyPr wrap="square"/>
-                    <a:lstStyle/>
-                    <a:p>
-                      <a:r>
-                        <a:rPr sz="1000"/>
-                        <a:t>IAM, Create DB, Parameters, HA, Scaling</a:t>
-                      </a:r>
-                    </a:p>
-                  </a:txBody>
-                  <a:tcPr/>
-                </a:tc>
-                <a:tc>
-                  <a:txBody>
-                    <a:bodyPr wrap="square"/>
-                    <a:lstStyle/>
-                    <a:p>
-                      <a:r>
-                        <a:rPr sz="1000"/>
-                        <a:t>PASS</a:t>
-                      </a:r>
-                    </a:p>
-                  </a:txBody>
-                  <a:tcPr/>
-                </a:tc>
-              </a:tr>
-              <a:tr h="522516">
-                <a:tc>
-                  <a:txBody>
-                    <a:bodyPr wrap="square"/>
-                    <a:lstStyle/>
-                    <a:p>
-                      <a:r>
-                        <a:rPr sz="1000"/>
-                        <a:t>Overall</a:t>
-                      </a:r>
-                    </a:p>
-                  </a:txBody>
-                  <a:tcPr/>
-                </a:tc>
-                <a:tc>
-                  <a:txBody>
-                    <a:bodyPr wrap="square"/>
-                    <a:lstStyle/>
-                    <a:p>
-                      <a:r>
-                        <a:rPr sz="1000"/>
-                        <a:t>CONDITIONAL PASS</a:t>
-                      </a:r>
-                    </a:p>
-                  </a:txBody>
-                  <a:tcPr/>
-                </a:tc>
-                <a:tc>
-                  <a:txBody>
-                    <a:bodyPr wrap="square"/>
-                    <a:lstStyle/>
-                    <a:p>
-                      <a:r>
-                        <a:rPr sz="1000"/>
-                        <a:t>Gap: 10 service dirs empty, physical deploy incomplete</a:t>
-                      </a:r>
-                    </a:p>
-                  </a:txBody>
-                  <a:tcPr/>
-                </a:tc>
-                <a:tc>
-                  <a:txBody>
-                    <a:bodyPr wrap="square"/>
-                    <a:lstStyle/>
-                    <a:p>
-                      <a:r>
-                        <a:rPr sz="1000"/>
-                        <a:t>—</a:t>
-                      </a:r>
-                    </a:p>
-                  </a:txBody>
-                  <a:tcPr/>
-                </a:tc>
-              </a:tr>
-            </a:tbl>
-          </a:graphicData>
-        </a:graphic>
-      </p:graphicFrame>
-    </p:spTree>
-  </p:cSld>
-  <p:clrMapOvr>
-    <a:masterClrMapping/>
-  </p:clrMapOvr>
-</p:sld>
-</file>
-
-<file path=ppt/slides/slide8.xml><?xml version="1.0" encoding="utf-8"?>
-<p:sld xmlns:a="http://schemas.openxmlformats.org/drawingml/2006/main" xmlns:p="http://schemas.openxmlformats.org/presentationml/2006/main" xmlns:r="http://schemas.openxmlformats.org/officeDocument/2006/relationships">
-  <p:cSld>
-    <p:spTree>
-      <p:nvGrpSpPr>
-        <p:cNvPr id="1" name=""/>
-        <p:cNvGrpSpPr/>
-        <p:nvPr/>
-      </p:nvGrpSpPr>
-      <p:grpSpPr/>
-      <p:sp>
-        <p:nvSpPr>
-          <p:cNvPr id="2" name="Title 1"/>
-          <p:cNvSpPr>
-            <a:spLocks noGrp="1"/>
-          </p:cNvSpPr>
-          <p:nvPr>
-            <p:ph type="title"/>
-          </p:nvPr>
-        </p:nvSpPr>
-        <p:spPr/>
-        <p:txBody>
-          <a:bodyPr/>
-          <a:lstStyle/>
-          <a:p>
-            <a:r>
-              <a:t>Infrastructure Validation Results</a:t>
-            </a:r>
-          </a:p>
-        </p:txBody>
-      </p:sp>
-      <p:sp>
-        <p:nvSpPr>
-          <p:cNvPr id="3" name="Content Placeholder 2"/>
-          <p:cNvSpPr>
-            <a:spLocks noGrp="1"/>
-          </p:cNvSpPr>
-          <p:nvPr>
-            <p:ph idx="1"/>
-          </p:nvPr>
-        </p:nvSpPr>
-        <p:spPr/>
-        <p:txBody>
-          <a:bodyPr/>
-          <a:lstStyle/>
-          <a:p/>
-        </p:txBody>
-      </p:sp>
-      <p:sp>
-        <p:nvSpPr>
-          <p:cNvPr id="4" name="TextBox 3"/>
-          <p:cNvSpPr txBox="1"/>
-          <p:nvPr/>
-        </p:nvSpPr>
-        <p:spPr>
-          <a:xfrm>
-            <a:off x="457200" y="1371600"/>
-            <a:ext cx="8229600" cy="4114800"/>
-          </a:xfrm>
-          <a:prstGeom prst="rect">
-            <a:avLst/>
-          </a:prstGeom>
-          <a:noFill/>
-        </p:spPr>
-        <p:txBody>
-          <a:bodyPr wrap="none">
-            <a:spAutoFit/>
-          </a:bodyPr>
-          <a:lstStyle/>
-          <a:p>
-            <a:r>
-              <a:t>Control Plane (OpenShift Pods): Keystone, Nova, Neutron, Cinder, Glance\nManaged by: Kubernetes Operators (replaces TripleO/Director)\n\nDatabase &amp; Messaging: MariaDB/Galera Operator + RabbitMQ Cluster Operator\n\nNetworking: OVN (Open Virtual Network) — exclusive backend, 6 network planes\n\nStorage: Red Hat Ceph Storage 8 (RBD for Cinder/Glance/Nova, CephFS for Manila)\n\nData Plane: Bare-metal RHEL 9 compute nodes (Libvirt + OVS/OVN agents)\nManaged by: Ansible via EDPM (External Data Plane Management)\n\nMinimal Footprint: 3 Master + 3 Worker OpenShift nodes + 2 EDPM compute nodes</a:t>
-            </a:r>
-          </a:p>
-        </p:txBody>
-      </p:sp>
-    </p:spTree>
-  </p:cSld>
-  <p:clrMapOvr>
-    <a:masterClrMapping/>
-  </p:clrMapOvr>
-</p:sld>
-</file>
-
-<file path=ppt/slides/slide9.xml><?xml version="1.0" encoding="utf-8"?>
-<p:sld xmlns:a="http://schemas.openxmlformats.org/drawingml/2006/main" xmlns:p="http://schemas.openxmlformats.org/presentationml/2006/main" xmlns:r="http://schemas.openxmlformats.org/officeDocument/2006/relationships">
-  <p:cSld>
-    <p:spTree>
-      <p:nvGrpSpPr>
-        <p:cNvPr id="1" name=""/>
-        <p:cNvGrpSpPr/>
-        <p:nvPr/>
-      </p:nvGrpSpPr>
-      <p:grpSpPr/>
-      <p:sp>
-        <p:nvSpPr>
-          <p:cNvPr id="2" name="Title 1"/>
-          <p:cNvSpPr>
-            <a:spLocks noGrp="1"/>
-          </p:cNvSpPr>
-          <p:nvPr>
-            <p:ph type="title"/>
-          </p:nvPr>
-        </p:nvSpPr>
-        <p:spPr/>
-        <p:txBody>
-          <a:bodyPr/>
-          <a:lstStyle/>
-          <a:p>
-            <a:r>
-              <a:t>RHOSO Architecture Overview</a:t>
-            </a:r>
-          </a:p>
-        </p:txBody>
-      </p:sp>
-      <p:sp>
-        <p:nvSpPr>
-          <p:cNvPr id="3" name="Content Placeholder 2"/>
-          <p:cNvSpPr>
-            <a:spLocks noGrp="1"/>
-          </p:cNvSpPr>
-          <p:nvPr>
-            <p:ph idx="1"/>
-          </p:nvPr>
-        </p:nvSpPr>
-        <p:spPr/>
-        <p:txBody>
-          <a:bodyPr/>
-          <a:lstStyle/>
-          <a:p/>
-        </p:txBody>
-      </p:sp>
-      <p:graphicFrame>
-        <p:nvGraphicFramePr>
-          <p:cNvPr id="4" name="Table 3"/>
-          <p:cNvGraphicFramePr>
-            <a:graphicFrameLocks noGrp="1"/>
-          </p:cNvGraphicFramePr>
-          <p:nvPr/>
-        </p:nvGraphicFramePr>
-        <p:xfrm>
-          <a:off x="457200" y="1371600"/>
-          <a:ext cx="8229600" cy="2743200"/>
-        </p:xfrm>
-        <a:graphic>
-          <a:graphicData uri="http://schemas.openxmlformats.org/drawingml/2006/table">
-            <a:tbl>
-              <a:tblPr firstRow="1" bandRow="1">
-                <a:tableStyleId>{5C22544A-7EE6-4342-B048-85BDC9FD1C3A}</a:tableStyleId>
-              </a:tblPr>
-              <a:tblGrid>
-                <a:gridCol w="2057400"/>
-                <a:gridCol w="2057400"/>
-                <a:gridCol w="2057400"/>
-                <a:gridCol w="2057400"/>
-              </a:tblGrid>
-              <a:tr h="685800">
-                <a:tc>
-                  <a:txBody>
-                    <a:bodyPr wrap="square"/>
-                    <a:lstStyle/>
-                    <a:p>
-                      <a:r>
-                        <a:rPr sz="1200" b="1"/>
-                        <a:t>Pattern</a:t>
-                      </a:r>
-                    </a:p>
-                  </a:txBody>
-                  <a:tcPr/>
-                </a:tc>
-                <a:tc>
-                  <a:txBody>
-                    <a:bodyPr wrap="square"/>
-                    <a:lstStyle/>
-                    <a:p>
-                      <a:r>
-                        <a:rPr sz="1200" b="1"/>
-                        <a:t>Infrastructure</a:t>
-                      </a:r>
-                    </a:p>
-                  </a:txBody>
-                  <a:tcPr/>
-                </a:tc>
-                <a:tc>
-                  <a:txBody>
-                    <a:bodyPr wrap="square"/>
-                    <a:lstStyle/>
-                    <a:p>
-                      <a:r>
-                        <a:rPr sz="1200" b="1"/>
-                        <a:t>Operational Burden</a:t>
-                      </a:r>
-                    </a:p>
-                  </a:txBody>
-                  <a:tcPr/>
-                </a:tc>
-                <a:tc>
-                  <a:txBody>
-                    <a:bodyPr wrap="square"/>
-                    <a:lstStyle/>
-                    <a:p>
-                      <a:r>
-                        <a:rPr sz="1200" b="1"/>
-                        <a:t>Recommendation</a:t>
-                      </a:r>
-                    </a:p>
-                  </a:txBody>
-                  <a:tcPr/>
-                </a:tc>
-              </a:tr>
-              <a:tr h="685800">
-                <a:tc>
-                  <a:txBody>
-                    <a:bodyPr wrap="square"/>
-                    <a:lstStyle/>
-                    <a:p>
-                      <a:r>
-                        <a:rPr sz="1000"/>
-                        <a:t>Pattern-1: Reuse on RHOSO</a:t>
-                      </a:r>
-                    </a:p>
-                  </a:txBody>
-                  <a:tcPr/>
-                </a:tc>
-                <a:tc>
-                  <a:txBody>
-                    <a:bodyPr wrap="square"/>
-                    <a:lstStyle/>
-                    <a:p>
-                      <a:r>
-                        <a:rPr sz="1000"/>
-                        <a:t>Shared OpenStack, customer-managed VMs + Ansible</a:t>
-                      </a:r>
-                    </a:p>
-                  </a:txBody>
-                  <a:tcPr/>
-                </a:tc>
-                <a:tc>
-                  <a:txBody>
-                    <a:bodyPr wrap="square"/>
-                    <a:lstStyle/>
-                    <a:p>
-                      <a:r>
-                        <a:rPr sz="1000"/>
-                        <a:t>HIGH — manual image &amp; config mgmt</a:t>
-                      </a:r>
-                    </a:p>
-                  </a:txBody>
-                  <a:tcPr/>
-                </a:tc>
-                <a:tc>
-                  <a:txBody>
-                    <a:bodyPr wrap="square"/>
-                    <a:lstStyle/>
-                    <a:p>
-                      <a:r>
-                        <a:rPr sz="1000"/>
-                        <a:t>Not recommended for production</a:t>
-                      </a:r>
-                    </a:p>
-                  </a:txBody>
-                  <a:tcPr/>
-                </a:tc>
-              </a:tr>
-              <a:tr h="685800">
-                <a:tc>
-                  <a:txBody>
-                    <a:bodyPr wrap="square"/>
-                    <a:lstStyle/>
-                    <a:p>
-                      <a:r>
-                        <a:rPr sz="1000"/>
-                        <a:t>Pattern-2A: Production RHOSO</a:t>
-                      </a:r>
-                    </a:p>
-                  </a:txBody>
-                  <a:tcPr/>
-                </a:tc>
-                <a:tc>
-                  <a:txBody>
-                    <a:bodyPr wrap="square"/>
-                    <a:lstStyle/>
-                    <a:p>
-                      <a:r>
-                        <a:rPr sz="1000"/>
-                        <a:t>Same OpenStack, custom DBaaS controller (TBD)</a:t>
-                      </a:r>
-                    </a:p>
-                  </a:txBody>
-                  <a:tcPr/>
-                </a:tc>
-                <a:tc>
-                  <a:txBody>
-                    <a:bodyPr wrap="square"/>
-                    <a:lstStyle/>
-                    <a:p>
-                      <a:r>
-                        <a:rPr sz="1000"/>
-                        <a:t>MEDIUM — custom dev required</a:t>
-                      </a:r>
-                    </a:p>
-                  </a:txBody>
-                  <a:tcPr/>
-                </a:tc>
-                <a:tc>
-                  <a:txBody>
-                    <a:bodyPr wrap="square"/>
-                    <a:lstStyle/>
-                    <a:p>
-                      <a:r>
-                        <a:rPr sz="1000"/>
-                        <a:t>Viable with investment</a:t>
-                      </a:r>
-                    </a:p>
-                  </a:txBody>
-                  <a:tcPr/>
-                </a:tc>
-              </a:tr>
-              <a:tr h="685800">
-                <a:tc>
-                  <a:txBody>
-                    <a:bodyPr wrap="square"/>
-                    <a:lstStyle/>
-                    <a:p>
-                      <a:r>
-                        <a:rPr sz="1000"/>
-                        <a:t>Pattern-2B: FPT Cloud</a:t>
-                      </a:r>
-                    </a:p>
-                  </a:txBody>
-                  <a:tcPr/>
-                </a:tc>
-                <a:tc>
-                  <a:txBody>
-                    <a:bodyPr wrap="square"/>
-                    <a:lstStyle/>
-                    <a:p>
-                      <a:r>
-                        <a:rPr sz="1000"/>
-                        <a:t>FPT Smart Cloud managed service (RDS)</a:t>
-                      </a:r>
-                    </a:p>
-                  </a:txBody>
-                  <a:tcPr/>
-                </a:tc>
-                <a:tc>
-                  <a:txBody>
-                    <a:bodyPr wrap="square"/>
-                    <a:lstStyle/>
-                    <a:p>
-                      <a:r>
-                        <a:rPr sz="1000"/>
-                        <a:t>LOW — built-in portal, no dev</a:t>
-                      </a:r>
-                    </a:p>
-                  </a:txBody>
-                  <a:tcPr/>
-                </a:tc>
-                <a:tc>
-                  <a:txBody>
-                    <a:bodyPr wrap="square"/>
-                    <a:lstStyle/>
-                    <a:p>
-                      <a:r>
-                        <a:rPr sz="1000"/>
-                        <a:t>RECOMMENDED</a:t>
-                      </a:r>
-                    </a:p>
-                  </a:txBody>
-                  <a:tcPr/>
-                </a:tc>
-              </a:tr>
-            </a:tbl>
-          </a:graphicData>
-        </a:graphic>
-      </p:graphicFrame>
+              <a:rPr sz="1800" b="1"/>
+              <a:t>OMO (Oh My OpenAgent)</a:t>
+            </a:r>
+          </a:p>
+        </p:txBody>
+      </p:sp>
     </p:spTree>
   </p:cSld>
   <p:clrMapOvr>
